--- a/7. Temporal Difference Method/7. Temporal Difference Method.pptx
+++ b/7. Temporal Difference Method/7. Temporal Difference Method.pptx
@@ -10,9 +10,13 @@
     <p:sldId id="258" r:id="rId4"/>
     <p:sldId id="259" r:id="rId5"/>
     <p:sldId id="264" r:id="rId6"/>
-    <p:sldId id="262" r:id="rId7"/>
-    <p:sldId id="263" r:id="rId8"/>
-    <p:sldId id="260" r:id="rId9"/>
+    <p:sldId id="266" r:id="rId7"/>
+    <p:sldId id="267" r:id="rId8"/>
+    <p:sldId id="262" r:id="rId9"/>
+    <p:sldId id="263" r:id="rId10"/>
+    <p:sldId id="268" r:id="rId11"/>
+    <p:sldId id="265" r:id="rId12"/>
+    <p:sldId id="260" r:id="rId13"/>
   </p:sldIdLst>
   <p:sldSz cx="12192000" cy="6858000"/>
   <p:notesSz cx="6858000" cy="9144000"/>
@@ -123,8 +127,8 @@
 <pc:chgInfo xmlns:a="http://schemas.openxmlformats.org/drawingml/2006/main" xmlns:r="http://schemas.openxmlformats.org/officeDocument/2006/relationships" xmlns:ac="http://schemas.microsoft.com/office/drawing/2013/main/command" xmlns:pc="http://schemas.microsoft.com/office/powerpoint/2013/main/command">
   <pc:docChgLst>
     <pc:chgData name="택주 권" userId="ccd56deedaff4490" providerId="LiveId" clId="{310B1D75-06D1-4C66-A4D9-8F949EB66769}"/>
-    <pc:docChg chg="undo redo custSel addSld delSld modSld">
-      <pc:chgData name="택주 권" userId="ccd56deedaff4490" providerId="LiveId" clId="{310B1D75-06D1-4C66-A4D9-8F949EB66769}" dt="2026-10-12T12:25:30.852" v="1553" actId="6549"/>
+    <pc:docChg chg="undo redo custSel addSld delSld modSld sldOrd">
+      <pc:chgData name="택주 권" userId="ccd56deedaff4490" providerId="LiveId" clId="{310B1D75-06D1-4C66-A4D9-8F949EB66769}" dt="2026-10-14T18:05:03.276" v="4319" actId="1035"/>
       <pc:docMkLst>
         <pc:docMk/>
       </pc:docMkLst>
@@ -159,13 +163,13 @@
         </pc:spChg>
       </pc:sldChg>
       <pc:sldChg chg="modSp mod">
-        <pc:chgData name="택주 권" userId="ccd56deedaff4490" providerId="LiveId" clId="{310B1D75-06D1-4C66-A4D9-8F949EB66769}" dt="2026-10-12T11:39:24.210" v="1368" actId="20577"/>
+        <pc:chgData name="택주 권" userId="ccd56deedaff4490" providerId="LiveId" clId="{310B1D75-06D1-4C66-A4D9-8F949EB66769}" dt="2026-10-14T17:01:21.662" v="1598" actId="20577"/>
         <pc:sldMkLst>
           <pc:docMk/>
           <pc:sldMk cId="3064923119" sldId="258"/>
         </pc:sldMkLst>
         <pc:spChg chg="mod">
-          <ac:chgData name="택주 권" userId="ccd56deedaff4490" providerId="LiveId" clId="{310B1D75-06D1-4C66-A4D9-8F949EB66769}" dt="2026-10-12T11:39:24.210" v="1368" actId="20577"/>
+          <ac:chgData name="택주 권" userId="ccd56deedaff4490" providerId="LiveId" clId="{310B1D75-06D1-4C66-A4D9-8F949EB66769}" dt="2026-10-14T17:01:21.662" v="1598" actId="20577"/>
           <ac:spMkLst>
             <pc:docMk/>
             <pc:sldMk cId="3064923119" sldId="258"/>
@@ -174,19 +178,27 @@
         </pc:spChg>
       </pc:sldChg>
       <pc:sldChg chg="addSp delSp modSp mod">
-        <pc:chgData name="택주 권" userId="ccd56deedaff4490" providerId="LiveId" clId="{310B1D75-06D1-4C66-A4D9-8F949EB66769}" dt="2026-10-12T12:25:12.487" v="1375" actId="478"/>
+        <pc:chgData name="택주 권" userId="ccd56deedaff4490" providerId="LiveId" clId="{310B1D75-06D1-4C66-A4D9-8F949EB66769}" dt="2026-10-14T17:11:57.634" v="1703" actId="20577"/>
         <pc:sldMkLst>
           <pc:docMk/>
           <pc:sldMk cId="2852760341" sldId="259"/>
         </pc:sldMkLst>
         <pc:spChg chg="mod">
-          <ac:chgData name="택주 권" userId="ccd56deedaff4490" providerId="LiveId" clId="{310B1D75-06D1-4C66-A4D9-8F949EB66769}" dt="2026-10-11T06:17:32.281" v="306" actId="20577"/>
+          <ac:chgData name="택주 권" userId="ccd56deedaff4490" providerId="LiveId" clId="{310B1D75-06D1-4C66-A4D9-8F949EB66769}" dt="2026-10-14T17:11:57.634" v="1703" actId="20577"/>
           <ac:spMkLst>
             <pc:docMk/>
             <pc:sldMk cId="2852760341" sldId="259"/>
             <ac:spMk id="3" creationId="{5852B724-E47B-9C14-9E1F-E5FE5A5B6B63}"/>
           </ac:spMkLst>
         </pc:spChg>
+        <pc:graphicFrameChg chg="add mod modGraphic">
+          <ac:chgData name="택주 권" userId="ccd56deedaff4490" providerId="LiveId" clId="{310B1D75-06D1-4C66-A4D9-8F949EB66769}" dt="2026-10-14T17:08:01" v="1662" actId="12385"/>
+          <ac:graphicFrameMkLst>
+            <pc:docMk/>
+            <pc:sldMk cId="2852760341" sldId="259"/>
+            <ac:graphicFrameMk id="4" creationId="{30F690BE-749A-F6D0-38C3-B0662AA4D867}"/>
+          </ac:graphicFrameMkLst>
+        </pc:graphicFrameChg>
         <pc:graphicFrameChg chg="del">
           <ac:chgData name="택주 권" userId="ccd56deedaff4490" providerId="LiveId" clId="{310B1D75-06D1-4C66-A4D9-8F949EB66769}" dt="2026-10-11T06:15:45.267" v="135" actId="478"/>
           <ac:graphicFrameMkLst>
@@ -203,15 +215,39 @@
             <ac:picMk id="5" creationId="{F5228757-5F4F-FE23-200A-CB25EC947FE1}"/>
           </ac:picMkLst>
         </pc:picChg>
+        <pc:picChg chg="add del">
+          <ac:chgData name="택주 권" userId="ccd56deedaff4490" providerId="LiveId" clId="{310B1D75-06D1-4C66-A4D9-8F949EB66769}" dt="2026-10-14T17:07:26.040" v="1661" actId="478"/>
+          <ac:picMkLst>
+            <pc:docMk/>
+            <pc:sldMk cId="2852760341" sldId="259"/>
+            <ac:picMk id="6" creationId="{839BA7B3-305A-9D4E-3E0F-2B6EB5990DBD}"/>
+          </ac:picMkLst>
+        </pc:picChg>
+        <pc:picChg chg="add mod">
+          <ac:chgData name="택주 권" userId="ccd56deedaff4490" providerId="LiveId" clId="{310B1D75-06D1-4C66-A4D9-8F949EB66769}" dt="2026-10-14T17:08:48.450" v="1673" actId="1076"/>
+          <ac:picMkLst>
+            <pc:docMk/>
+            <pc:sldMk cId="2852760341" sldId="259"/>
+            <ac:picMk id="8" creationId="{01F7B0CA-832B-E3DC-9A00-9010A5A88236}"/>
+          </ac:picMkLst>
+        </pc:picChg>
+        <pc:picChg chg="add mod">
+          <ac:chgData name="택주 권" userId="ccd56deedaff4490" providerId="LiveId" clId="{310B1D75-06D1-4C66-A4D9-8F949EB66769}" dt="2026-10-14T17:08:31.973" v="1669" actId="1076"/>
+          <ac:picMkLst>
+            <pc:docMk/>
+            <pc:sldMk cId="2852760341" sldId="259"/>
+            <ac:picMk id="10" creationId="{6357C024-1E62-53BB-785A-7C4AD7CFB414}"/>
+          </ac:picMkLst>
+        </pc:picChg>
       </pc:sldChg>
       <pc:sldChg chg="modSp mod">
-        <pc:chgData name="택주 권" userId="ccd56deedaff4490" providerId="LiveId" clId="{310B1D75-06D1-4C66-A4D9-8F949EB66769}" dt="2026-10-12T12:25:30.852" v="1553" actId="6549"/>
+        <pc:chgData name="택주 권" userId="ccd56deedaff4490" providerId="LiveId" clId="{310B1D75-06D1-4C66-A4D9-8F949EB66769}" dt="2026-10-14T17:43:24.535" v="3274" actId="20577"/>
         <pc:sldMkLst>
           <pc:docMk/>
           <pc:sldMk cId="2170711995" sldId="260"/>
         </pc:sldMkLst>
         <pc:spChg chg="mod">
-          <ac:chgData name="택주 권" userId="ccd56deedaff4490" providerId="LiveId" clId="{310B1D75-06D1-4C66-A4D9-8F949EB66769}" dt="2026-10-12T12:25:30.852" v="1553" actId="6549"/>
+          <ac:chgData name="택주 권" userId="ccd56deedaff4490" providerId="LiveId" clId="{310B1D75-06D1-4C66-A4D9-8F949EB66769}" dt="2026-10-14T17:43:24.535" v="3274" actId="20577"/>
           <ac:spMkLst>
             <pc:docMk/>
             <pc:sldMk cId="2170711995" sldId="260"/>
@@ -235,13 +271,13 @@
         </pc:spChg>
       </pc:sldChg>
       <pc:sldChg chg="addSp delSp modSp add del mod">
-        <pc:chgData name="택주 권" userId="ccd56deedaff4490" providerId="LiveId" clId="{310B1D75-06D1-4C66-A4D9-8F949EB66769}" dt="2026-10-12T12:25:13.930" v="1376" actId="478"/>
+        <pc:chgData name="택주 권" userId="ccd56deedaff4490" providerId="LiveId" clId="{310B1D75-06D1-4C66-A4D9-8F949EB66769}" dt="2026-10-14T17:33:25.040" v="2163" actId="207"/>
         <pc:sldMkLst>
           <pc:docMk/>
           <pc:sldMk cId="3977347988" sldId="262"/>
         </pc:sldMkLst>
         <pc:spChg chg="mod">
-          <ac:chgData name="택주 권" userId="ccd56deedaff4490" providerId="LiveId" clId="{310B1D75-06D1-4C66-A4D9-8F949EB66769}" dt="2026-10-11T06:16:23.639" v="189" actId="14100"/>
+          <ac:chgData name="택주 권" userId="ccd56deedaff4490" providerId="LiveId" clId="{310B1D75-06D1-4C66-A4D9-8F949EB66769}" dt="2026-10-14T17:33:25.040" v="2163" actId="207"/>
           <ac:spMkLst>
             <pc:docMk/>
             <pc:sldMk cId="3977347988" sldId="262"/>
@@ -256,12 +292,44 @@
             <ac:graphicFrameMk id="4" creationId="{4310EFC3-BCD6-55C4-321B-0E4B59F33698}"/>
           </ac:graphicFrameMkLst>
         </pc:graphicFrameChg>
+        <pc:graphicFrameChg chg="add del mod">
+          <ac:chgData name="택주 권" userId="ccd56deedaff4490" providerId="LiveId" clId="{310B1D75-06D1-4C66-A4D9-8F949EB66769}" dt="2026-10-14T17:15:18.987" v="1888" actId="478"/>
+          <ac:graphicFrameMkLst>
+            <pc:docMk/>
+            <pc:sldMk cId="3977347988" sldId="262"/>
+            <ac:graphicFrameMk id="4" creationId="{BC43164C-6142-0998-3F9D-C702675E0380}"/>
+          </ac:graphicFrameMkLst>
+        </pc:graphicFrameChg>
+        <pc:graphicFrameChg chg="add mod">
+          <ac:chgData name="택주 권" userId="ccd56deedaff4490" providerId="LiveId" clId="{310B1D75-06D1-4C66-A4D9-8F949EB66769}" dt="2026-10-14T17:15:19.463" v="1889"/>
+          <ac:graphicFrameMkLst>
+            <pc:docMk/>
+            <pc:sldMk cId="3977347988" sldId="262"/>
+            <ac:graphicFrameMk id="5" creationId="{2BA7E514-D5FF-FAC0-CB5E-B454970C1262}"/>
+          </ac:graphicFrameMkLst>
+        </pc:graphicFrameChg>
         <pc:picChg chg="add del mod">
           <ac:chgData name="택주 권" userId="ccd56deedaff4490" providerId="LiveId" clId="{310B1D75-06D1-4C66-A4D9-8F949EB66769}" dt="2026-10-12T12:25:13.930" v="1376" actId="478"/>
           <ac:picMkLst>
             <pc:docMk/>
             <pc:sldMk cId="3977347988" sldId="262"/>
             <ac:picMk id="5" creationId="{BB1762B1-45F4-0A45-FAAC-7FC7ABBBC188}"/>
+          </ac:picMkLst>
+        </pc:picChg>
+        <pc:picChg chg="add mod">
+          <ac:chgData name="택주 권" userId="ccd56deedaff4490" providerId="LiveId" clId="{310B1D75-06D1-4C66-A4D9-8F949EB66769}" dt="2026-10-14T17:15:49.146" v="1895" actId="1076"/>
+          <ac:picMkLst>
+            <pc:docMk/>
+            <pc:sldMk cId="3977347988" sldId="262"/>
+            <ac:picMk id="7" creationId="{9FE25693-67B8-9D8C-A9D4-CC3AB3EECD44}"/>
+          </ac:picMkLst>
+        </pc:picChg>
+        <pc:picChg chg="add mod">
+          <ac:chgData name="택주 권" userId="ccd56deedaff4490" providerId="LiveId" clId="{310B1D75-06D1-4C66-A4D9-8F949EB66769}" dt="2026-10-14T17:16:05.266" v="1901" actId="1076"/>
+          <ac:picMkLst>
+            <pc:docMk/>
+            <pc:sldMk cId="3977347988" sldId="262"/>
+            <ac:picMk id="9" creationId="{B28FFEE2-2258-B98E-4EFE-782A32409AD5}"/>
           </ac:picMkLst>
         </pc:picChg>
       </pc:sldChg>
@@ -280,18 +348,206 @@
           </ac:spMkLst>
         </pc:spChg>
       </pc:sldChg>
-      <pc:sldChg chg="add">
-        <pc:chgData name="택주 권" userId="ccd56deedaff4490" providerId="LiveId" clId="{310B1D75-06D1-4C66-A4D9-8F949EB66769}" dt="2026-10-11T06:17:48.230" v="311"/>
+      <pc:sldChg chg="addSp delSp modSp add mod">
+        <pc:chgData name="택주 권" userId="ccd56deedaff4490" providerId="LiveId" clId="{310B1D75-06D1-4C66-A4D9-8F949EB66769}" dt="2026-10-14T17:19:22.269" v="2029" actId="1036"/>
         <pc:sldMkLst>
           <pc:docMk/>
           <pc:sldMk cId="1948267706" sldId="263"/>
         </pc:sldMkLst>
+        <pc:spChg chg="mod">
+          <ac:chgData name="택주 권" userId="ccd56deedaff4490" providerId="LiveId" clId="{310B1D75-06D1-4C66-A4D9-8F949EB66769}" dt="2026-10-14T17:19:11.242" v="2015"/>
+          <ac:spMkLst>
+            <pc:docMk/>
+            <pc:sldMk cId="1948267706" sldId="263"/>
+            <ac:spMk id="3" creationId="{5852B724-E47B-9C14-9E1F-E5FE5A5B6B63}"/>
+          </ac:spMkLst>
+        </pc:spChg>
+        <pc:graphicFrameChg chg="add mod modGraphic">
+          <ac:chgData name="택주 권" userId="ccd56deedaff4490" providerId="LiveId" clId="{310B1D75-06D1-4C66-A4D9-8F949EB66769}" dt="2026-10-14T17:19:22.269" v="2029" actId="1036"/>
+          <ac:graphicFrameMkLst>
+            <pc:docMk/>
+            <pc:sldMk cId="1948267706" sldId="263"/>
+            <ac:graphicFrameMk id="8" creationId="{4B3B7DC5-7641-16D0-C891-C3E16AF6CABE}"/>
+          </ac:graphicFrameMkLst>
+        </pc:graphicFrameChg>
+        <pc:picChg chg="add del">
+          <ac:chgData name="택주 권" userId="ccd56deedaff4490" providerId="LiveId" clId="{310B1D75-06D1-4C66-A4D9-8F949EB66769}" dt="2026-10-14T17:16:12.706" v="1903" actId="22"/>
+          <ac:picMkLst>
+            <pc:docMk/>
+            <pc:sldMk cId="1948267706" sldId="263"/>
+            <ac:picMk id="5" creationId="{610DCB62-E012-27ED-29CB-4D2132252E4C}"/>
+          </ac:picMkLst>
+        </pc:picChg>
+        <pc:picChg chg="add mod">
+          <ac:chgData name="택주 권" userId="ccd56deedaff4490" providerId="LiveId" clId="{310B1D75-06D1-4C66-A4D9-8F949EB66769}" dt="2026-10-14T17:19:22.269" v="2029" actId="1036"/>
+          <ac:picMkLst>
+            <pc:docMk/>
+            <pc:sldMk cId="1948267706" sldId="263"/>
+            <ac:picMk id="7" creationId="{6841EDE3-038E-A037-21E1-EC0B9DD8DB5B}"/>
+          </ac:picMkLst>
+        </pc:picChg>
       </pc:sldChg>
-      <pc:sldChg chg="add">
-        <pc:chgData name="택주 권" userId="ccd56deedaff4490" providerId="LiveId" clId="{310B1D75-06D1-4C66-A4D9-8F949EB66769}" dt="2026-10-11T06:17:50.125" v="312"/>
+      <pc:sldChg chg="addSp modSp add mod">
+        <pc:chgData name="택주 권" userId="ccd56deedaff4490" providerId="LiveId" clId="{310B1D75-06D1-4C66-A4D9-8F949EB66769}" dt="2026-10-14T17:15:04.155" v="1887" actId="14100"/>
         <pc:sldMkLst>
           <pc:docMk/>
           <pc:sldMk cId="3240711704" sldId="264"/>
+        </pc:sldMkLst>
+        <pc:spChg chg="mod">
+          <ac:chgData name="택주 권" userId="ccd56deedaff4490" providerId="LiveId" clId="{310B1D75-06D1-4C66-A4D9-8F949EB66769}" dt="2026-10-14T17:12:18.265" v="1713" actId="20577"/>
+          <ac:spMkLst>
+            <pc:docMk/>
+            <pc:sldMk cId="3240711704" sldId="264"/>
+            <ac:spMk id="3" creationId="{5852B724-E47B-9C14-9E1F-E5FE5A5B6B63}"/>
+          </ac:spMkLst>
+        </pc:spChg>
+        <pc:graphicFrameChg chg="add mod modGraphic">
+          <ac:chgData name="택주 권" userId="ccd56deedaff4490" providerId="LiveId" clId="{310B1D75-06D1-4C66-A4D9-8F949EB66769}" dt="2026-10-14T17:15:04.155" v="1887" actId="14100"/>
+          <ac:graphicFrameMkLst>
+            <pc:docMk/>
+            <pc:sldMk cId="3240711704" sldId="264"/>
+            <ac:graphicFrameMk id="6" creationId="{44D28236-6767-233F-25C0-5463903E9DAC}"/>
+          </ac:graphicFrameMkLst>
+        </pc:graphicFrameChg>
+        <pc:picChg chg="add mod">
+          <ac:chgData name="택주 권" userId="ccd56deedaff4490" providerId="LiveId" clId="{310B1D75-06D1-4C66-A4D9-8F949EB66769}" dt="2026-10-14T17:12:45.215" v="1716" actId="1076"/>
+          <ac:picMkLst>
+            <pc:docMk/>
+            <pc:sldMk cId="3240711704" sldId="264"/>
+            <ac:picMk id="5" creationId="{42EA6CDA-C911-EE26-219F-01DE458587DA}"/>
+          </ac:picMkLst>
+        </pc:picChg>
+      </pc:sldChg>
+      <pc:sldChg chg="addSp delSp modSp add mod ord">
+        <pc:chgData name="택주 권" userId="ccd56deedaff4490" providerId="LiveId" clId="{310B1D75-06D1-4C66-A4D9-8F949EB66769}" dt="2026-10-14T18:05:03.276" v="4319" actId="1035"/>
+        <pc:sldMkLst>
+          <pc:docMk/>
+          <pc:sldMk cId="755901126" sldId="265"/>
+        </pc:sldMkLst>
+        <pc:spChg chg="mod">
+          <ac:chgData name="택주 권" userId="ccd56deedaff4490" providerId="LiveId" clId="{310B1D75-06D1-4C66-A4D9-8F949EB66769}" dt="2026-10-14T17:19:57.693" v="2049" actId="20577"/>
+          <ac:spMkLst>
+            <pc:docMk/>
+            <pc:sldMk cId="755901126" sldId="265"/>
+            <ac:spMk id="3" creationId="{5852B724-E47B-9C14-9E1F-E5FE5A5B6B63}"/>
+          </ac:spMkLst>
+        </pc:spChg>
+        <pc:spChg chg="add mod">
+          <ac:chgData name="택주 권" userId="ccd56deedaff4490" providerId="LiveId" clId="{310B1D75-06D1-4C66-A4D9-8F949EB66769}" dt="2026-10-14T18:05:03.276" v="4319" actId="1035"/>
+          <ac:spMkLst>
+            <pc:docMk/>
+            <pc:sldMk cId="755901126" sldId="265"/>
+            <ac:spMk id="9" creationId="{FEFD02A3-6D24-4528-F8D1-4504BA2D3A16}"/>
+          </ac:spMkLst>
+        </pc:spChg>
+        <pc:graphicFrameChg chg="add del mod modGraphic">
+          <ac:chgData name="택주 권" userId="ccd56deedaff4490" providerId="LiveId" clId="{310B1D75-06D1-4C66-A4D9-8F949EB66769}" dt="2026-10-14T17:46:35.482" v="3280" actId="478"/>
+          <ac:graphicFrameMkLst>
+            <pc:docMk/>
+            <pc:sldMk cId="755901126" sldId="265"/>
+            <ac:graphicFrameMk id="4" creationId="{83CA9959-569B-B35A-6B5C-70FAFDB10DCA}"/>
+          </ac:graphicFrameMkLst>
+        </pc:graphicFrameChg>
+        <pc:picChg chg="add del mod">
+          <ac:chgData name="택주 권" userId="ccd56deedaff4490" providerId="LiveId" clId="{310B1D75-06D1-4C66-A4D9-8F949EB66769}" dt="2026-10-14T17:46:36.182" v="3281" actId="478"/>
+          <ac:picMkLst>
+            <pc:docMk/>
+            <pc:sldMk cId="755901126" sldId="265"/>
+            <ac:picMk id="6" creationId="{1689D963-5846-B476-9DA1-09A46CB031EB}"/>
+          </ac:picMkLst>
+        </pc:picChg>
+        <pc:picChg chg="add del mod">
+          <ac:chgData name="택주 권" userId="ccd56deedaff4490" providerId="LiveId" clId="{310B1D75-06D1-4C66-A4D9-8F949EB66769}" dt="2026-10-14T17:46:36.965" v="3282" actId="478"/>
+          <ac:picMkLst>
+            <pc:docMk/>
+            <pc:sldMk cId="755901126" sldId="265"/>
+            <ac:picMk id="8" creationId="{306079B1-2BBD-5335-29F2-FBBF2E6DEE2E}"/>
+          </ac:picMkLst>
+        </pc:picChg>
+      </pc:sldChg>
+      <pc:sldChg chg="addSp modSp add mod ord">
+        <pc:chgData name="택주 권" userId="ccd56deedaff4490" providerId="LiveId" clId="{310B1D75-06D1-4C66-A4D9-8F949EB66769}" dt="2026-10-14T17:25:17.826" v="2155" actId="14100"/>
+        <pc:sldMkLst>
+          <pc:docMk/>
+          <pc:sldMk cId="829851047" sldId="266"/>
+        </pc:sldMkLst>
+        <pc:spChg chg="mod">
+          <ac:chgData name="택주 권" userId="ccd56deedaff4490" providerId="LiveId" clId="{310B1D75-06D1-4C66-A4D9-8F949EB66769}" dt="2026-10-14T17:18:11.757" v="1969" actId="14100"/>
+          <ac:spMkLst>
+            <pc:docMk/>
+            <pc:sldMk cId="829851047" sldId="266"/>
+            <ac:spMk id="3" creationId="{5852B724-E47B-9C14-9E1F-E5FE5A5B6B63}"/>
+          </ac:spMkLst>
+        </pc:spChg>
+        <pc:graphicFrameChg chg="add mod">
+          <ac:chgData name="택주 권" userId="ccd56deedaff4490" providerId="LiveId" clId="{310B1D75-06D1-4C66-A4D9-8F949EB66769}" dt="2026-10-14T17:24:29.975" v="2148"/>
+          <ac:graphicFrameMkLst>
+            <pc:docMk/>
+            <pc:sldMk cId="829851047" sldId="266"/>
+            <ac:graphicFrameMk id="4" creationId="{6AFE07DB-898A-46BD-127F-8AA150AFD879}"/>
+          </ac:graphicFrameMkLst>
+        </pc:graphicFrameChg>
+        <pc:picChg chg="add mod">
+          <ac:chgData name="택주 권" userId="ccd56deedaff4490" providerId="LiveId" clId="{310B1D75-06D1-4C66-A4D9-8F949EB66769}" dt="2026-10-14T17:24:58.829" v="2151" actId="1076"/>
+          <ac:picMkLst>
+            <pc:docMk/>
+            <pc:sldMk cId="829851047" sldId="266"/>
+            <ac:picMk id="6" creationId="{AD8F004C-727C-26CA-8208-FC4CD418F70F}"/>
+          </ac:picMkLst>
+        </pc:picChg>
+        <pc:picChg chg="add mod">
+          <ac:chgData name="택주 권" userId="ccd56deedaff4490" providerId="LiveId" clId="{310B1D75-06D1-4C66-A4D9-8F949EB66769}" dt="2026-10-14T17:25:17.826" v="2155" actId="14100"/>
+          <ac:picMkLst>
+            <pc:docMk/>
+            <pc:sldMk cId="829851047" sldId="266"/>
+            <ac:picMk id="8" creationId="{9EAA50DE-645A-0CC7-F442-4B5100114B71}"/>
+          </ac:picMkLst>
+        </pc:picChg>
+      </pc:sldChg>
+      <pc:sldChg chg="addSp delSp modSp add mod">
+        <pc:chgData name="택주 권" userId="ccd56deedaff4490" providerId="LiveId" clId="{310B1D75-06D1-4C66-A4D9-8F949EB66769}" dt="2026-10-14T18:04:46.351" v="4301" actId="20577"/>
+        <pc:sldMkLst>
+          <pc:docMk/>
+          <pc:sldMk cId="3255352950" sldId="267"/>
+        </pc:sldMkLst>
+        <pc:spChg chg="add mod">
+          <ac:chgData name="택주 권" userId="ccd56deedaff4490" providerId="LiveId" clId="{310B1D75-06D1-4C66-A4D9-8F949EB66769}" dt="2026-10-14T18:04:46.351" v="4301" actId="20577"/>
+          <ac:spMkLst>
+            <pc:docMk/>
+            <pc:sldMk cId="3255352950" sldId="267"/>
+            <ac:spMk id="5" creationId="{6F72E5F3-15D7-ED72-35BC-2B09031FD665}"/>
+          </ac:spMkLst>
+        </pc:spChg>
+        <pc:graphicFrameChg chg="del">
+          <ac:chgData name="택주 권" userId="ccd56deedaff4490" providerId="LiveId" clId="{310B1D75-06D1-4C66-A4D9-8F949EB66769}" dt="2026-10-14T17:46:22.167" v="3276" actId="478"/>
+          <ac:graphicFrameMkLst>
+            <pc:docMk/>
+            <pc:sldMk cId="3255352950" sldId="267"/>
+            <ac:graphicFrameMk id="4" creationId="{6AFE07DB-898A-46BD-127F-8AA150AFD879}"/>
+          </ac:graphicFrameMkLst>
+        </pc:graphicFrameChg>
+        <pc:picChg chg="del">
+          <ac:chgData name="택주 권" userId="ccd56deedaff4490" providerId="LiveId" clId="{310B1D75-06D1-4C66-A4D9-8F949EB66769}" dt="2026-10-14T17:46:24.518" v="3277" actId="478"/>
+          <ac:picMkLst>
+            <pc:docMk/>
+            <pc:sldMk cId="3255352950" sldId="267"/>
+            <ac:picMk id="6" creationId="{AD8F004C-727C-26CA-8208-FC4CD418F70F}"/>
+          </ac:picMkLst>
+        </pc:picChg>
+        <pc:picChg chg="del">
+          <ac:chgData name="택주 권" userId="ccd56deedaff4490" providerId="LiveId" clId="{310B1D75-06D1-4C66-A4D9-8F949EB66769}" dt="2026-10-14T17:46:25.755" v="3278" actId="478"/>
+          <ac:picMkLst>
+            <pc:docMk/>
+            <pc:sldMk cId="3255352950" sldId="267"/>
+            <ac:picMk id="8" creationId="{9EAA50DE-645A-0CC7-F442-4B5100114B71}"/>
+          </ac:picMkLst>
+        </pc:picChg>
+      </pc:sldChg>
+      <pc:sldChg chg="add">
+        <pc:chgData name="택주 권" userId="ccd56deedaff4490" providerId="LiveId" clId="{310B1D75-06D1-4C66-A4D9-8F949EB66769}" dt="2026-10-14T17:46:31.184" v="3279"/>
+        <pc:sldMkLst>
+          <pc:docMk/>
+          <pc:sldMk cId="2976136579" sldId="268"/>
         </pc:sldMkLst>
       </pc:sldChg>
     </pc:docChg>
@@ -1341,7 +1597,7 @@
           <a:p>
             <a:fld id="{0028FE92-352A-4F29-A53E-D4449191C064}" type="datetimeFigureOut">
               <a:rPr lang="ko-KR" altLang="en-US" smtClean="0"/>
-              <a:t>2026-10-12</a:t>
+              <a:t>2026-10-15</a:t>
             </a:fld>
             <a:endParaRPr lang="ko-KR" altLang="en-US"/>
           </a:p>
@@ -1575,7 +1831,7 @@
           <a:p>
             <a:fld id="{0028FE92-352A-4F29-A53E-D4449191C064}" type="datetimeFigureOut">
               <a:rPr lang="ko-KR" altLang="en-US" smtClean="0"/>
-              <a:t>2026-10-12</a:t>
+              <a:t>2026-10-15</a:t>
             </a:fld>
             <a:endParaRPr lang="ko-KR" altLang="en-US"/>
           </a:p>
@@ -1783,7 +2039,7 @@
           <a:p>
             <a:fld id="{0028FE92-352A-4F29-A53E-D4449191C064}" type="datetimeFigureOut">
               <a:rPr lang="ko-KR" altLang="en-US" smtClean="0"/>
-              <a:t>2026-10-12</a:t>
+              <a:t>2026-10-15</a:t>
             </a:fld>
             <a:endParaRPr lang="ko-KR" altLang="en-US"/>
           </a:p>
@@ -1988,7 +2244,7 @@
           <a:p>
             <a:fld id="{0028FE92-352A-4F29-A53E-D4449191C064}" type="datetimeFigureOut">
               <a:rPr lang="ko-KR" altLang="en-US" smtClean="0"/>
-              <a:t>2026-10-12</a:t>
+              <a:t>2026-10-15</a:t>
             </a:fld>
             <a:endParaRPr lang="ko-KR" altLang="en-US"/>
           </a:p>
@@ -2299,7 +2555,7 @@
           <a:p>
             <a:fld id="{0028FE92-352A-4F29-A53E-D4449191C064}" type="datetimeFigureOut">
               <a:rPr lang="ko-KR" altLang="en-US" smtClean="0"/>
-              <a:t>2026-10-12</a:t>
+              <a:t>2026-10-15</a:t>
             </a:fld>
             <a:endParaRPr lang="ko-KR" altLang="en-US"/>
           </a:p>
@@ -2564,7 +2820,7 @@
           <a:p>
             <a:fld id="{0028FE92-352A-4F29-A53E-D4449191C064}" type="datetimeFigureOut">
               <a:rPr lang="ko-KR" altLang="en-US" smtClean="0"/>
-              <a:t>2026-10-12</a:t>
+              <a:t>2026-10-15</a:t>
             </a:fld>
             <a:endParaRPr lang="ko-KR" altLang="en-US"/>
           </a:p>
@@ -2976,7 +3232,7 @@
           <a:p>
             <a:fld id="{0028FE92-352A-4F29-A53E-D4449191C064}" type="datetimeFigureOut">
               <a:rPr lang="ko-KR" altLang="en-US" smtClean="0"/>
-              <a:t>2026-10-12</a:t>
+              <a:t>2026-10-15</a:t>
             </a:fld>
             <a:endParaRPr lang="ko-KR" altLang="en-US"/>
           </a:p>
@@ -3117,7 +3373,7 @@
           <a:p>
             <a:fld id="{0028FE92-352A-4F29-A53E-D4449191C064}" type="datetimeFigureOut">
               <a:rPr lang="ko-KR" altLang="en-US" smtClean="0"/>
-              <a:t>2026-10-12</a:t>
+              <a:t>2026-10-15</a:t>
             </a:fld>
             <a:endParaRPr lang="ko-KR" altLang="en-US"/>
           </a:p>
@@ -3230,7 +3486,7 @@
           <a:p>
             <a:fld id="{0028FE92-352A-4F29-A53E-D4449191C064}" type="datetimeFigureOut">
               <a:rPr lang="ko-KR" altLang="en-US" smtClean="0"/>
-              <a:t>2026-10-12</a:t>
+              <a:t>2026-10-15</a:t>
             </a:fld>
             <a:endParaRPr lang="ko-KR" altLang="en-US"/>
           </a:p>
@@ -3541,7 +3797,7 @@
           <a:p>
             <a:fld id="{0028FE92-352A-4F29-A53E-D4449191C064}" type="datetimeFigureOut">
               <a:rPr lang="ko-KR" altLang="en-US" smtClean="0"/>
-              <a:t>2026-10-12</a:t>
+              <a:t>2026-10-15</a:t>
             </a:fld>
             <a:endParaRPr lang="ko-KR" altLang="en-US"/>
           </a:p>
@@ -3829,7 +4085,7 @@
           <a:p>
             <a:fld id="{0028FE92-352A-4F29-A53E-D4449191C064}" type="datetimeFigureOut">
               <a:rPr lang="ko-KR" altLang="en-US" smtClean="0"/>
-              <a:t>2026-10-12</a:t>
+              <a:t>2026-10-15</a:t>
             </a:fld>
             <a:endParaRPr lang="ko-KR" altLang="en-US"/>
           </a:p>
@@ -4070,7 +4326,7 @@
           <a:p>
             <a:fld id="{0028FE92-352A-4F29-A53E-D4449191C064}" type="datetimeFigureOut">
               <a:rPr lang="ko-KR" altLang="en-US" smtClean="0"/>
-              <a:t>2026-10-12</a:t>
+              <a:t>2026-10-15</a:t>
             </a:fld>
             <a:endParaRPr lang="ko-KR" altLang="en-US"/>
           </a:p>
@@ -4655,6 +4911,1301 @@
 </p:sld>
 </file>
 
+<file path=ppt/slides/slide10.xml><?xml version="1.0" encoding="utf-8"?>
+<p:sld xmlns:a="http://schemas.openxmlformats.org/drawingml/2006/main" xmlns:r="http://schemas.openxmlformats.org/officeDocument/2006/relationships" xmlns:p="http://schemas.openxmlformats.org/presentationml/2006/main">
+  <p:cSld>
+    <p:spTree>
+      <p:nvGrpSpPr>
+        <p:cNvPr id="1" name=""/>
+        <p:cNvGrpSpPr/>
+        <p:nvPr/>
+      </p:nvGrpSpPr>
+      <p:grpSpPr>
+        <a:xfrm>
+          <a:off x="0" y="0"/>
+          <a:ext cx="0" cy="0"/>
+          <a:chOff x="0" y="0"/>
+          <a:chExt cx="0" cy="0"/>
+        </a:xfrm>
+      </p:grpSpPr>
+      <p:sp>
+        <p:nvSpPr>
+          <p:cNvPr id="2" name="제목 1">
+            <a:extLst>
+              <a:ext uri="{FF2B5EF4-FFF2-40B4-BE49-F238E27FC236}">
+                <a16:creationId xmlns:a16="http://schemas.microsoft.com/office/drawing/2014/main" id="{05F47E05-2409-F2F5-E759-8FF54D92678B}"/>
+              </a:ext>
+            </a:extLst>
+          </p:cNvPr>
+          <p:cNvSpPr>
+            <a:spLocks noGrp="1"/>
+          </p:cNvSpPr>
+          <p:nvPr>
+            <p:ph type="title"/>
+          </p:nvPr>
+        </p:nvSpPr>
+        <p:spPr/>
+        <p:txBody>
+          <a:bodyPr/>
+          <a:lstStyle/>
+          <a:p>
+            <a:r>
+              <a:rPr lang="ko-KR" altLang="en-US" dirty="0"/>
+              <a:t>과제 풀이</a:t>
+            </a:r>
+          </a:p>
+        </p:txBody>
+      </p:sp>
+      <p:sp>
+        <p:nvSpPr>
+          <p:cNvPr id="3" name="내용 개체 틀 2">
+            <a:extLst>
+              <a:ext uri="{FF2B5EF4-FFF2-40B4-BE49-F238E27FC236}">
+                <a16:creationId xmlns:a16="http://schemas.microsoft.com/office/drawing/2014/main" id="{5852B724-E47B-9C14-9E1F-E5FE5A5B6B63}"/>
+              </a:ext>
+            </a:extLst>
+          </p:cNvPr>
+          <p:cNvSpPr>
+            <a:spLocks noGrp="1"/>
+          </p:cNvSpPr>
+          <p:nvPr>
+            <p:ph idx="1"/>
+          </p:nvPr>
+        </p:nvSpPr>
+        <p:spPr>
+          <a:xfrm>
+            <a:off x="838200" y="1825625"/>
+            <a:ext cx="11013558" cy="4351338"/>
+          </a:xfrm>
+        </p:spPr>
+        <p:txBody>
+          <a:bodyPr/>
+          <a:lstStyle/>
+          <a:p>
+            <a:pPr marL="0" indent="0">
+              <a:buNone/>
+            </a:pPr>
+            <a:r>
+              <a:rPr lang="en-US" altLang="ko-KR" b="1" dirty="0"/>
+              <a:t>Temporal Difference Method – Q-Learning | Alpha, Epsilon</a:t>
+            </a:r>
+            <a:endParaRPr lang="ko-KR" altLang="en-US" b="1" dirty="0"/>
+          </a:p>
+        </p:txBody>
+      </p:sp>
+      <p:graphicFrame>
+        <p:nvGraphicFramePr>
+          <p:cNvPr id="4" name="표 3">
+            <a:extLst>
+              <a:ext uri="{FF2B5EF4-FFF2-40B4-BE49-F238E27FC236}">
+                <a16:creationId xmlns:a16="http://schemas.microsoft.com/office/drawing/2014/main" id="{83CA9959-569B-B35A-6B5C-70FAFDB10DCA}"/>
+              </a:ext>
+            </a:extLst>
+          </p:cNvPr>
+          <p:cNvGraphicFramePr>
+            <a:graphicFrameLocks noGrp="1"/>
+          </p:cNvGraphicFramePr>
+          <p:nvPr/>
+        </p:nvGraphicFramePr>
+        <p:xfrm>
+          <a:off x="765543" y="2420875"/>
+          <a:ext cx="10660914" cy="741680"/>
+        </p:xfrm>
+        <a:graphic>
+          <a:graphicData uri="http://schemas.openxmlformats.org/drawingml/2006/table">
+            <a:tbl>
+              <a:tblPr firstRow="1" bandRow="1">
+                <a:tableStyleId>{2D5ABB26-0587-4C30-8999-92F81FD0307C}</a:tableStyleId>
+              </a:tblPr>
+              <a:tblGrid>
+                <a:gridCol w="3553638">
+                  <a:extLst>
+                    <a:ext uri="{9D8B030D-6E8A-4147-A177-3AD203B41FA5}">
+                      <a16:colId xmlns:a16="http://schemas.microsoft.com/office/drawing/2014/main" val="1865542858"/>
+                    </a:ext>
+                  </a:extLst>
+                </a:gridCol>
+                <a:gridCol w="3553638">
+                  <a:extLst>
+                    <a:ext uri="{9D8B030D-6E8A-4147-A177-3AD203B41FA5}">
+                      <a16:colId xmlns:a16="http://schemas.microsoft.com/office/drawing/2014/main" val="3464385553"/>
+                    </a:ext>
+                  </a:extLst>
+                </a:gridCol>
+                <a:gridCol w="3553638">
+                  <a:extLst>
+                    <a:ext uri="{9D8B030D-6E8A-4147-A177-3AD203B41FA5}">
+                      <a16:colId xmlns:a16="http://schemas.microsoft.com/office/drawing/2014/main" val="1974042333"/>
+                    </a:ext>
+                  </a:extLst>
+                </a:gridCol>
+              </a:tblGrid>
+              <a:tr h="370840">
+                <a:tc>
+                  <a:txBody>
+                    <a:bodyPr/>
+                    <a:lstStyle/>
+                    <a:p>
+                      <a:pPr latinLnBrk="1"/>
+                      <a:r>
+                        <a:rPr lang="ko-KR" altLang="en-US" b="1" dirty="0"/>
+                        <a:t>파라미터별 학습 보상</a:t>
+                      </a:r>
+                    </a:p>
+                  </a:txBody>
+                  <a:tcPr/>
+                </a:tc>
+                <a:tc>
+                  <a:txBody>
+                    <a:bodyPr/>
+                    <a:lstStyle/>
+                    <a:p>
+                      <a:pPr latinLnBrk="1"/>
+                      <a:endParaRPr lang="ko-KR" altLang="en-US" b="1" dirty="0"/>
+                    </a:p>
+                  </a:txBody>
+                  <a:tcPr/>
+                </a:tc>
+                <a:tc>
+                  <a:txBody>
+                    <a:bodyPr/>
+                    <a:lstStyle/>
+                    <a:p>
+                      <a:pPr latinLnBrk="1"/>
+                      <a:r>
+                        <a:rPr lang="en-US" altLang="ko-KR" b="1" dirty="0"/>
+                        <a:t>Greedy </a:t>
+                      </a:r>
+                      <a:r>
+                        <a:rPr lang="ko-KR" altLang="en-US" b="1" dirty="0"/>
+                        <a:t>평가 </a:t>
+                      </a:r>
+                      <a:r>
+                        <a:rPr lang="ko-KR" altLang="en-US" b="1" dirty="0" err="1"/>
+                        <a:t>히트맵</a:t>
+                      </a:r>
+                      <a:endParaRPr lang="ko-KR" altLang="en-US" b="1" dirty="0"/>
+                    </a:p>
+                  </a:txBody>
+                  <a:tcPr/>
+                </a:tc>
+                <a:extLst>
+                  <a:ext uri="{0D108BD9-81ED-4DB2-BD59-A6C34878D82A}">
+                    <a16:rowId xmlns:a16="http://schemas.microsoft.com/office/drawing/2014/main" val="1764033668"/>
+                  </a:ext>
+                </a:extLst>
+              </a:tr>
+              <a:tr h="370840">
+                <a:tc>
+                  <a:txBody>
+                    <a:bodyPr/>
+                    <a:lstStyle/>
+                    <a:p>
+                      <a:pPr latinLnBrk="1"/>
+                      <a:endParaRPr lang="ko-KR" altLang="en-US" b="1"/>
+                    </a:p>
+                  </a:txBody>
+                  <a:tcPr/>
+                </a:tc>
+                <a:tc>
+                  <a:txBody>
+                    <a:bodyPr/>
+                    <a:lstStyle/>
+                    <a:p>
+                      <a:pPr latinLnBrk="1"/>
+                      <a:endParaRPr lang="ko-KR" altLang="en-US" b="1"/>
+                    </a:p>
+                  </a:txBody>
+                  <a:tcPr/>
+                </a:tc>
+                <a:tc>
+                  <a:txBody>
+                    <a:bodyPr/>
+                    <a:lstStyle/>
+                    <a:p>
+                      <a:pPr latinLnBrk="1"/>
+                      <a:endParaRPr lang="ko-KR" altLang="en-US" b="1" dirty="0"/>
+                    </a:p>
+                  </a:txBody>
+                  <a:tcPr/>
+                </a:tc>
+                <a:extLst>
+                  <a:ext uri="{0D108BD9-81ED-4DB2-BD59-A6C34878D82A}">
+                    <a16:rowId xmlns:a16="http://schemas.microsoft.com/office/drawing/2014/main" val="1248983614"/>
+                  </a:ext>
+                </a:extLst>
+              </a:tr>
+            </a:tbl>
+          </a:graphicData>
+        </a:graphic>
+      </p:graphicFrame>
+      <p:pic>
+        <p:nvPicPr>
+          <p:cNvPr id="6" name="그림 5">
+            <a:extLst>
+              <a:ext uri="{FF2B5EF4-FFF2-40B4-BE49-F238E27FC236}">
+                <a16:creationId xmlns:a16="http://schemas.microsoft.com/office/drawing/2014/main" id="{1689D963-5846-B476-9DA1-09A46CB031EB}"/>
+              </a:ext>
+            </a:extLst>
+          </p:cNvPr>
+          <p:cNvPicPr>
+            <a:picLocks noChangeAspect="1"/>
+          </p:cNvPicPr>
+          <p:nvPr/>
+        </p:nvPicPr>
+        <p:blipFill>
+          <a:blip r:embed="rId2">
+            <a:extLst>
+              <a:ext uri="{28A0092B-C50C-407E-A947-70E740481C1C}">
+                <a14:useLocalDpi xmlns:a14="http://schemas.microsoft.com/office/drawing/2010/main" val="0"/>
+              </a:ext>
+            </a:extLst>
+          </a:blip>
+          <a:stretch>
+            <a:fillRect/>
+          </a:stretch>
+        </p:blipFill>
+        <p:spPr>
+          <a:xfrm>
+            <a:off x="838200" y="2768913"/>
+            <a:ext cx="6181062" cy="2247658"/>
+          </a:xfrm>
+          <a:prstGeom prst="rect">
+            <a:avLst/>
+          </a:prstGeom>
+        </p:spPr>
+      </p:pic>
+      <p:pic>
+        <p:nvPicPr>
+          <p:cNvPr id="8" name="그림 7">
+            <a:extLst>
+              <a:ext uri="{FF2B5EF4-FFF2-40B4-BE49-F238E27FC236}">
+                <a16:creationId xmlns:a16="http://schemas.microsoft.com/office/drawing/2014/main" id="{306079B1-2BBD-5335-29F2-FBBF2E6DEE2E}"/>
+              </a:ext>
+            </a:extLst>
+          </p:cNvPr>
+          <p:cNvPicPr>
+            <a:picLocks noChangeAspect="1"/>
+          </p:cNvPicPr>
+          <p:nvPr/>
+        </p:nvPicPr>
+        <p:blipFill>
+          <a:blip r:embed="rId3">
+            <a:extLst>
+              <a:ext uri="{28A0092B-C50C-407E-A947-70E740481C1C}">
+                <a14:useLocalDpi xmlns:a14="http://schemas.microsoft.com/office/drawing/2010/main" val="0"/>
+              </a:ext>
+            </a:extLst>
+          </a:blip>
+          <a:stretch>
+            <a:fillRect/>
+          </a:stretch>
+        </p:blipFill>
+        <p:spPr>
+          <a:xfrm>
+            <a:off x="7486652" y="2756963"/>
+            <a:ext cx="3514946" cy="2259608"/>
+          </a:xfrm>
+          <a:prstGeom prst="rect">
+            <a:avLst/>
+          </a:prstGeom>
+        </p:spPr>
+      </p:pic>
+    </p:spTree>
+    <p:extLst>
+      <p:ext uri="{BB962C8B-B14F-4D97-AF65-F5344CB8AC3E}">
+        <p14:creationId xmlns:p14="http://schemas.microsoft.com/office/powerpoint/2010/main" val="2976136579"/>
+      </p:ext>
+    </p:extLst>
+  </p:cSld>
+  <p:clrMapOvr>
+    <a:masterClrMapping/>
+  </p:clrMapOvr>
+</p:sld>
+</file>
+
+<file path=ppt/slides/slide11.xml><?xml version="1.0" encoding="utf-8"?>
+<p:sld xmlns:a="http://schemas.openxmlformats.org/drawingml/2006/main" xmlns:r="http://schemas.openxmlformats.org/officeDocument/2006/relationships" xmlns:p="http://schemas.openxmlformats.org/presentationml/2006/main">
+  <p:cSld>
+    <p:spTree>
+      <p:nvGrpSpPr>
+        <p:cNvPr id="1" name=""/>
+        <p:cNvGrpSpPr/>
+        <p:nvPr/>
+      </p:nvGrpSpPr>
+      <p:grpSpPr>
+        <a:xfrm>
+          <a:off x="0" y="0"/>
+          <a:ext cx="0" cy="0"/>
+          <a:chOff x="0" y="0"/>
+          <a:chExt cx="0" cy="0"/>
+        </a:xfrm>
+      </p:grpSpPr>
+      <p:sp>
+        <p:nvSpPr>
+          <p:cNvPr id="2" name="제목 1">
+            <a:extLst>
+              <a:ext uri="{FF2B5EF4-FFF2-40B4-BE49-F238E27FC236}">
+                <a16:creationId xmlns:a16="http://schemas.microsoft.com/office/drawing/2014/main" id="{05F47E05-2409-F2F5-E759-8FF54D92678B}"/>
+              </a:ext>
+            </a:extLst>
+          </p:cNvPr>
+          <p:cNvSpPr>
+            <a:spLocks noGrp="1"/>
+          </p:cNvSpPr>
+          <p:nvPr>
+            <p:ph type="title"/>
+          </p:nvPr>
+        </p:nvSpPr>
+        <p:spPr/>
+        <p:txBody>
+          <a:bodyPr/>
+          <a:lstStyle/>
+          <a:p>
+            <a:r>
+              <a:rPr lang="ko-KR" altLang="en-US" dirty="0"/>
+              <a:t>과제 풀이</a:t>
+            </a:r>
+          </a:p>
+        </p:txBody>
+      </p:sp>
+      <p:sp>
+        <p:nvSpPr>
+          <p:cNvPr id="3" name="내용 개체 틀 2">
+            <a:extLst>
+              <a:ext uri="{FF2B5EF4-FFF2-40B4-BE49-F238E27FC236}">
+                <a16:creationId xmlns:a16="http://schemas.microsoft.com/office/drawing/2014/main" id="{5852B724-E47B-9C14-9E1F-E5FE5A5B6B63}"/>
+              </a:ext>
+            </a:extLst>
+          </p:cNvPr>
+          <p:cNvSpPr>
+            <a:spLocks noGrp="1"/>
+          </p:cNvSpPr>
+          <p:nvPr>
+            <p:ph idx="1"/>
+          </p:nvPr>
+        </p:nvSpPr>
+        <p:spPr>
+          <a:xfrm>
+            <a:off x="838200" y="1825625"/>
+            <a:ext cx="11013558" cy="4351338"/>
+          </a:xfrm>
+        </p:spPr>
+        <p:txBody>
+          <a:bodyPr/>
+          <a:lstStyle/>
+          <a:p>
+            <a:pPr marL="0" indent="0">
+              <a:buNone/>
+            </a:pPr>
+            <a:r>
+              <a:rPr lang="en-US" altLang="ko-KR" b="1" dirty="0"/>
+              <a:t>Temporal Difference Method – Q-Learning | Alpha, Epsilon</a:t>
+            </a:r>
+            <a:endParaRPr lang="ko-KR" altLang="en-US" b="1" dirty="0"/>
+          </a:p>
+        </p:txBody>
+      </p:sp>
+      <p:sp>
+        <p:nvSpPr>
+          <p:cNvPr id="9" name="TextBox 8">
+            <a:extLst>
+              <a:ext uri="{FF2B5EF4-FFF2-40B4-BE49-F238E27FC236}">
+                <a16:creationId xmlns:a16="http://schemas.microsoft.com/office/drawing/2014/main" id="{FEFD02A3-6D24-4528-F8D1-4504BA2D3A16}"/>
+              </a:ext>
+            </a:extLst>
+          </p:cNvPr>
+          <p:cNvSpPr txBox="1"/>
+          <p:nvPr/>
+        </p:nvSpPr>
+        <p:spPr>
+          <a:xfrm>
+            <a:off x="1020726" y="2285468"/>
+            <a:ext cx="9700614" cy="3939540"/>
+          </a:xfrm>
+          <a:prstGeom prst="rect">
+            <a:avLst/>
+          </a:prstGeom>
+          <a:noFill/>
+        </p:spPr>
+        <p:txBody>
+          <a:bodyPr wrap="square" rtlCol="0">
+            <a:spAutoFit/>
+          </a:bodyPr>
+          <a:lstStyle/>
+          <a:p>
+            <a:r>
+              <a:rPr lang="en-US" altLang="ko-KR" b="1" dirty="0"/>
+              <a:t>Alpha </a:t>
+            </a:r>
+            <a:r>
+              <a:rPr lang="ko-KR" altLang="en-US" b="1" dirty="0"/>
+              <a:t>변화에 따른 학습 보상</a:t>
+            </a:r>
+          </a:p>
+          <a:p>
+            <a:pPr>
+              <a:buFont typeface="Arial" panose="020B0604020202020204" pitchFamily="34" charset="0"/>
+              <a:buChar char="•"/>
+            </a:pPr>
+            <a:r>
+              <a:rPr lang="en-US" altLang="ko-KR" sz="1400" b="1" dirty="0"/>
+              <a:t>Alpha 0.1:</a:t>
+            </a:r>
+            <a:r>
+              <a:rPr lang="ko-KR" altLang="en-US" sz="1400" dirty="0"/>
+              <a:t> 평균 보상 </a:t>
+            </a:r>
+            <a:r>
+              <a:rPr lang="en-US" altLang="ko-KR" sz="1400" dirty="0"/>
+              <a:t>0.411 </a:t>
+            </a:r>
+            <a:r>
+              <a:rPr lang="ko-KR" altLang="en-US" sz="1400" dirty="0"/>
+              <a:t>기록</a:t>
+            </a:r>
+            <a:r>
+              <a:rPr lang="en-US" altLang="ko-KR" sz="1400" dirty="0"/>
+              <a:t>. </a:t>
+            </a:r>
+            <a:r>
+              <a:rPr lang="ko-KR" altLang="en-US" sz="1400" dirty="0"/>
+              <a:t>작은 </a:t>
+            </a:r>
+            <a:r>
+              <a:rPr lang="ko-KR" altLang="en-US" sz="1400" dirty="0" err="1"/>
+              <a:t>학습률로</a:t>
+            </a:r>
+            <a:r>
+              <a:rPr lang="ko-KR" altLang="en-US" sz="1400" dirty="0"/>
+              <a:t> </a:t>
+            </a:r>
+            <a:r>
+              <a:rPr lang="en-US" altLang="ko-KR" sz="1400" dirty="0"/>
+              <a:t>Q-Value</a:t>
+            </a:r>
+            <a:r>
+              <a:rPr lang="ko-KR" altLang="en-US" sz="1400" dirty="0"/>
+              <a:t>를 점진적으로 갱신함</a:t>
+            </a:r>
+            <a:r>
+              <a:rPr lang="en-US" altLang="ko-KR" sz="1400" dirty="0"/>
+              <a:t>.</a:t>
+            </a:r>
+          </a:p>
+          <a:p>
+            <a:pPr>
+              <a:buFont typeface="Arial" panose="020B0604020202020204" pitchFamily="34" charset="0"/>
+              <a:buChar char="•"/>
+            </a:pPr>
+            <a:r>
+              <a:rPr lang="en-US" altLang="ko-KR" sz="1400" b="1" dirty="0"/>
+              <a:t>Alpha 0.3:</a:t>
+            </a:r>
+            <a:r>
+              <a:rPr lang="ko-KR" altLang="en-US" sz="1400" dirty="0"/>
+              <a:t> 가장 높은 평균 보상 </a:t>
+            </a:r>
+            <a:r>
+              <a:rPr lang="en-US" altLang="ko-KR" sz="1400" dirty="0"/>
+              <a:t>0.417 </a:t>
+            </a:r>
+            <a:r>
+              <a:rPr lang="ko-KR" altLang="en-US" sz="1400" dirty="0"/>
+              <a:t>기록</a:t>
+            </a:r>
+            <a:r>
+              <a:rPr lang="en-US" altLang="ko-KR" sz="1400" dirty="0"/>
+              <a:t>. TD </a:t>
+            </a:r>
+            <a:r>
+              <a:rPr lang="ko-KR" altLang="en-US" sz="1400" dirty="0"/>
+              <a:t>오차 반영 비율 증가에도 안정적인 학습 성능 유지</a:t>
+            </a:r>
+            <a:r>
+              <a:rPr lang="en-US" altLang="ko-KR" sz="1400" dirty="0"/>
+              <a:t>.</a:t>
+            </a:r>
+          </a:p>
+          <a:p>
+            <a:pPr>
+              <a:buFont typeface="Arial" panose="020B0604020202020204" pitchFamily="34" charset="0"/>
+              <a:buChar char="•"/>
+            </a:pPr>
+            <a:r>
+              <a:rPr lang="en-US" altLang="ko-KR" sz="1400" b="1" dirty="0"/>
+              <a:t>Alpha 0.8:</a:t>
+            </a:r>
+            <a:r>
+              <a:rPr lang="ko-KR" altLang="en-US" sz="1400" dirty="0"/>
+              <a:t> 평균 보상 </a:t>
+            </a:r>
+            <a:r>
+              <a:rPr lang="en-US" altLang="ko-KR" sz="1400" dirty="0"/>
+              <a:t>0.415 </a:t>
+            </a:r>
+            <a:r>
+              <a:rPr lang="ko-KR" altLang="en-US" sz="1400" dirty="0"/>
+              <a:t>기록</a:t>
+            </a:r>
+            <a:r>
+              <a:rPr lang="en-US" altLang="ko-KR" sz="1400" dirty="0"/>
+              <a:t>. </a:t>
+            </a:r>
+            <a:r>
+              <a:rPr lang="ko-KR" altLang="en-US" sz="1400" dirty="0"/>
+              <a:t>높은 </a:t>
+            </a:r>
+            <a:r>
+              <a:rPr lang="ko-KR" altLang="en-US" sz="1400" dirty="0" err="1"/>
+              <a:t>학습률에서도</a:t>
+            </a:r>
+            <a:r>
+              <a:rPr lang="ko-KR" altLang="en-US" sz="1400" dirty="0"/>
+              <a:t> 큰 성능 저하가 발생하지 않음</a:t>
+            </a:r>
+            <a:r>
+              <a:rPr lang="en-US" altLang="ko-KR" sz="1400" dirty="0"/>
+              <a:t>.</a:t>
+            </a:r>
+          </a:p>
+          <a:p>
+            <a:pPr>
+              <a:buFont typeface="Arial" panose="020B0604020202020204" pitchFamily="34" charset="0"/>
+              <a:buChar char="•"/>
+            </a:pPr>
+            <a:r>
+              <a:rPr lang="ko-KR" altLang="en-US" sz="1400" b="1" dirty="0"/>
+              <a:t>분석</a:t>
+            </a:r>
+            <a:r>
+              <a:rPr lang="en-US" altLang="ko-KR" sz="1400" b="1" dirty="0"/>
+              <a:t>:</a:t>
+            </a:r>
+            <a:r>
+              <a:rPr lang="ko-KR" altLang="en-US" sz="1400" dirty="0"/>
+              <a:t> </a:t>
+            </a:r>
+            <a:r>
+              <a:rPr lang="en-US" altLang="ko-KR" sz="1400" dirty="0"/>
+              <a:t>Alpha </a:t>
+            </a:r>
+            <a:r>
+              <a:rPr lang="ko-KR" altLang="en-US" sz="1400" dirty="0"/>
+              <a:t>변화에도 평균 보상 </a:t>
+            </a:r>
+            <a:r>
+              <a:rPr lang="en-US" altLang="ko-KR" sz="1400" dirty="0"/>
+              <a:t>0.411~0.417 </a:t>
+            </a:r>
+            <a:r>
+              <a:rPr lang="ko-KR" altLang="en-US" sz="1400" dirty="0"/>
+              <a:t>유지</a:t>
+            </a:r>
+            <a:r>
+              <a:rPr lang="en-US" altLang="ko-KR" sz="1400" dirty="0"/>
+              <a:t>. </a:t>
+            </a:r>
+            <a:r>
+              <a:rPr lang="ko-KR" altLang="en-US" sz="1400" dirty="0"/>
+              <a:t>최대 </a:t>
+            </a:r>
+            <a:r>
+              <a:rPr lang="en-US" altLang="ko-KR" sz="1400" dirty="0"/>
+              <a:t>Q-Value</a:t>
+            </a:r>
+            <a:r>
+              <a:rPr lang="ko-KR" altLang="en-US" sz="1400" dirty="0"/>
+              <a:t>를 활용하는 </a:t>
+            </a:r>
+            <a:r>
+              <a:rPr lang="en-US" altLang="ko-KR" sz="1400" dirty="0"/>
+              <a:t>Off-Policy </a:t>
+            </a:r>
+            <a:r>
+              <a:rPr lang="ko-KR" altLang="en-US" sz="1400" dirty="0"/>
+              <a:t>학습 특성과 관련됨</a:t>
+            </a:r>
+            <a:r>
+              <a:rPr lang="en-US" altLang="ko-KR" sz="1400" dirty="0"/>
+              <a:t>.</a:t>
+            </a:r>
+          </a:p>
+          <a:p>
+            <a:pPr>
+              <a:buFont typeface="Arial" panose="020B0604020202020204" pitchFamily="34" charset="0"/>
+              <a:buChar char="•"/>
+            </a:pPr>
+            <a:endParaRPr lang="en-US" altLang="ko-KR" sz="1400" dirty="0"/>
+          </a:p>
+          <a:p>
+            <a:r>
+              <a:rPr lang="en-US" altLang="ko-KR" b="1" dirty="0"/>
+              <a:t>Epsilon </a:t>
+            </a:r>
+            <a:r>
+              <a:rPr lang="ko-KR" altLang="en-US" b="1" dirty="0"/>
+              <a:t>변화에 따른 학습 보상</a:t>
+            </a:r>
+          </a:p>
+          <a:p>
+            <a:pPr>
+              <a:buFont typeface="Arial" panose="020B0604020202020204" pitchFamily="34" charset="0"/>
+              <a:buChar char="•"/>
+            </a:pPr>
+            <a:r>
+              <a:rPr lang="en-US" altLang="ko-KR" sz="1400" b="1" dirty="0"/>
+              <a:t>Epsilon 0.01:</a:t>
+            </a:r>
+            <a:r>
+              <a:rPr lang="ko-KR" altLang="en-US" sz="1400" dirty="0"/>
+              <a:t> 가장 높은 평균 보상 </a:t>
+            </a:r>
+            <a:r>
+              <a:rPr lang="en-US" altLang="ko-KR" sz="1400" dirty="0"/>
+              <a:t>0.473 </a:t>
+            </a:r>
+            <a:r>
+              <a:rPr lang="ko-KR" altLang="en-US" sz="1400" dirty="0"/>
+              <a:t>기록</a:t>
+            </a:r>
+            <a:r>
+              <a:rPr lang="en-US" altLang="ko-KR" sz="1400" dirty="0"/>
+              <a:t>. </a:t>
+            </a:r>
+            <a:r>
+              <a:rPr lang="ko-KR" altLang="en-US" sz="1400" dirty="0"/>
+              <a:t>탐색 비율이 낮아 효율적인 이동 경로를 자주 선택함</a:t>
+            </a:r>
+            <a:r>
+              <a:rPr lang="en-US" altLang="ko-KR" sz="1400" dirty="0"/>
+              <a:t>.</a:t>
+            </a:r>
+          </a:p>
+          <a:p>
+            <a:pPr>
+              <a:buFont typeface="Arial" panose="020B0604020202020204" pitchFamily="34" charset="0"/>
+              <a:buChar char="•"/>
+            </a:pPr>
+            <a:r>
+              <a:rPr lang="en-US" altLang="ko-KR" sz="1400" b="1" dirty="0"/>
+              <a:t>Epsilon 0.1~0.3:</a:t>
+            </a:r>
+            <a:r>
+              <a:rPr lang="ko-KR" altLang="en-US" sz="1400" dirty="0"/>
+              <a:t> 평균 보상 </a:t>
+            </a:r>
+            <a:r>
+              <a:rPr lang="en-US" altLang="ko-KR" sz="1400" dirty="0"/>
+              <a:t>0.415 → 0.251 </a:t>
+            </a:r>
+            <a:r>
+              <a:rPr lang="ko-KR" altLang="en-US" sz="1400" dirty="0"/>
+              <a:t>감소</a:t>
+            </a:r>
+            <a:r>
+              <a:rPr lang="en-US" altLang="ko-KR" sz="1400" dirty="0"/>
+              <a:t>. </a:t>
+            </a:r>
+            <a:r>
+              <a:rPr lang="ko-KR" altLang="en-US" sz="1400" dirty="0"/>
+              <a:t>탐색 확률 증가에 따른 </a:t>
+            </a:r>
+            <a:r>
+              <a:rPr lang="ko-KR" altLang="en-US" sz="1400" dirty="0" err="1"/>
+              <a:t>비최적</a:t>
+            </a:r>
+            <a:r>
+              <a:rPr lang="ko-KR" altLang="en-US" sz="1400" dirty="0"/>
+              <a:t> 행동 발생</a:t>
+            </a:r>
+            <a:r>
+              <a:rPr lang="en-US" altLang="ko-KR" sz="1400" dirty="0"/>
+              <a:t>.</a:t>
+            </a:r>
+          </a:p>
+          <a:p>
+            <a:pPr>
+              <a:buFont typeface="Arial" panose="020B0604020202020204" pitchFamily="34" charset="0"/>
+              <a:buChar char="•"/>
+            </a:pPr>
+            <a:r>
+              <a:rPr lang="en-US" altLang="ko-KR" sz="1400" b="1" dirty="0"/>
+              <a:t>Epsilon 0.5:</a:t>
+            </a:r>
+            <a:r>
+              <a:rPr lang="ko-KR" altLang="en-US" sz="1400" dirty="0"/>
+              <a:t> 평균 보상 </a:t>
+            </a:r>
+            <a:r>
+              <a:rPr lang="en-US" altLang="ko-KR" sz="1400" dirty="0"/>
+              <a:t>0.055 </a:t>
+            </a:r>
+            <a:r>
+              <a:rPr lang="ko-KR" altLang="en-US" sz="1400" dirty="0"/>
+              <a:t>기록</a:t>
+            </a:r>
+            <a:r>
+              <a:rPr lang="en-US" altLang="ko-KR" sz="1400" dirty="0"/>
+              <a:t>. </a:t>
+            </a:r>
+            <a:r>
+              <a:rPr lang="ko-KR" altLang="en-US" sz="1400" dirty="0"/>
+              <a:t>높은 탐색 확률로 학습 중 이동 효율 감소</a:t>
+            </a:r>
+            <a:r>
+              <a:rPr lang="en-US" altLang="ko-KR" sz="1400" dirty="0"/>
+              <a:t>.</a:t>
+            </a:r>
+          </a:p>
+          <a:p>
+            <a:pPr>
+              <a:buFont typeface="Arial" panose="020B0604020202020204" pitchFamily="34" charset="0"/>
+              <a:buChar char="•"/>
+            </a:pPr>
+            <a:r>
+              <a:rPr lang="ko-KR" altLang="en-US" sz="1400" b="1" dirty="0"/>
+              <a:t>분석</a:t>
+            </a:r>
+            <a:r>
+              <a:rPr lang="en-US" altLang="ko-KR" sz="1400" b="1" dirty="0"/>
+              <a:t>:</a:t>
+            </a:r>
+            <a:r>
+              <a:rPr lang="ko-KR" altLang="en-US" sz="1400" dirty="0"/>
+              <a:t> </a:t>
+            </a:r>
+            <a:r>
+              <a:rPr lang="en-US" altLang="ko-KR" sz="1400" dirty="0"/>
+              <a:t>Epsilon </a:t>
+            </a:r>
+            <a:r>
+              <a:rPr lang="ko-KR" altLang="en-US" sz="1400" dirty="0"/>
+              <a:t>증가에 따라 학습 보상이 감소함</a:t>
+            </a:r>
+            <a:r>
+              <a:rPr lang="en-US" altLang="ko-KR" sz="1400" dirty="0"/>
+              <a:t>. </a:t>
+            </a:r>
+            <a:r>
+              <a:rPr lang="ko-KR" altLang="en-US" sz="1400" dirty="0"/>
+              <a:t>다음 상태의 최대 </a:t>
+            </a:r>
+            <a:r>
+              <a:rPr lang="en-US" altLang="ko-KR" sz="1400" dirty="0"/>
+              <a:t>Q-Value</a:t>
+            </a:r>
+            <a:r>
+              <a:rPr lang="ko-KR" altLang="en-US" sz="1400" dirty="0"/>
+              <a:t>를 사용하여 최적 행동 가치를 학습함</a:t>
+            </a:r>
+            <a:r>
+              <a:rPr lang="en-US" altLang="ko-KR" sz="1400" dirty="0"/>
+              <a:t>.</a:t>
+            </a:r>
+          </a:p>
+          <a:p>
+            <a:pPr>
+              <a:buFont typeface="Arial" panose="020B0604020202020204" pitchFamily="34" charset="0"/>
+              <a:buChar char="•"/>
+            </a:pPr>
+            <a:endParaRPr lang="en-US" altLang="ko-KR" sz="1400" dirty="0"/>
+          </a:p>
+          <a:p>
+            <a:r>
+              <a:rPr lang="en-US" altLang="ko-KR" b="1" dirty="0"/>
+              <a:t>Alpha–Epsilon Greedy </a:t>
+            </a:r>
+            <a:r>
+              <a:rPr lang="ko-KR" altLang="en-US" b="1" dirty="0"/>
+              <a:t>평가 </a:t>
+            </a:r>
+            <a:r>
+              <a:rPr lang="ko-KR" altLang="en-US" b="1" dirty="0" err="1"/>
+              <a:t>히트맵</a:t>
+            </a:r>
+            <a:endParaRPr lang="ko-KR" altLang="en-US" b="1" dirty="0"/>
+          </a:p>
+          <a:p>
+            <a:pPr>
+              <a:buFont typeface="Arial" panose="020B0604020202020204" pitchFamily="34" charset="0"/>
+              <a:buChar char="•"/>
+            </a:pPr>
+            <a:r>
+              <a:rPr lang="ko-KR" altLang="en-US" sz="1400" b="1" dirty="0"/>
+              <a:t>전체 파라미터 조합</a:t>
+            </a:r>
+            <a:r>
+              <a:rPr lang="en-US" altLang="ko-KR" sz="1400" b="1" dirty="0"/>
+              <a:t>:</a:t>
+            </a:r>
+            <a:r>
+              <a:rPr lang="ko-KR" altLang="en-US" sz="1400" dirty="0"/>
+              <a:t> </a:t>
+            </a:r>
+            <a:r>
+              <a:rPr lang="en-US" altLang="ko-KR" sz="1400" dirty="0"/>
+              <a:t>Alpha 0.1~0.8, Epsilon 0.01~0.5</a:t>
+            </a:r>
+            <a:r>
+              <a:rPr lang="ko-KR" altLang="en-US" sz="1400" dirty="0"/>
+              <a:t>에서 평가 보상 </a:t>
+            </a:r>
+            <a:r>
+              <a:rPr lang="en-US" altLang="ko-KR" sz="1400" dirty="0"/>
+              <a:t>0.478 </a:t>
+            </a:r>
+            <a:r>
+              <a:rPr lang="ko-KR" altLang="en-US" sz="1400" dirty="0"/>
+              <a:t>기록</a:t>
+            </a:r>
+            <a:r>
+              <a:rPr lang="en-US" altLang="ko-KR" sz="1400" dirty="0"/>
+              <a:t>.</a:t>
+            </a:r>
+          </a:p>
+          <a:p>
+            <a:pPr>
+              <a:buFont typeface="Arial" panose="020B0604020202020204" pitchFamily="34" charset="0"/>
+              <a:buChar char="•"/>
+            </a:pPr>
+            <a:r>
+              <a:rPr lang="ko-KR" altLang="en-US" sz="1400" b="1" dirty="0"/>
+              <a:t>목표 도달</a:t>
+            </a:r>
+            <a:r>
+              <a:rPr lang="en-US" altLang="ko-KR" sz="1400" b="1" dirty="0"/>
+              <a:t>:</a:t>
+            </a:r>
+            <a:r>
+              <a:rPr lang="ko-KR" altLang="en-US" sz="1400" dirty="0"/>
+              <a:t> 총 </a:t>
+            </a:r>
+            <a:r>
+              <a:rPr lang="en-US" altLang="ko-KR" sz="1400" dirty="0"/>
+              <a:t>60</a:t>
+            </a:r>
+            <a:r>
+              <a:rPr lang="ko-KR" altLang="en-US" sz="1400" dirty="0"/>
+              <a:t>회 실험 모두 </a:t>
+            </a:r>
+            <a:r>
+              <a:rPr lang="en-US" altLang="ko-KR" sz="1400" dirty="0"/>
+              <a:t>8</a:t>
+            </a:r>
+            <a:r>
+              <a:rPr lang="ko-KR" altLang="en-US" sz="1400" dirty="0"/>
+              <a:t>스텝으로 목표에 도달하며 성공률 </a:t>
+            </a:r>
+            <a:r>
+              <a:rPr lang="en-US" altLang="ko-KR" sz="1400" dirty="0"/>
+              <a:t>100% </a:t>
+            </a:r>
+            <a:r>
+              <a:rPr lang="ko-KR" altLang="en-US" sz="1400" dirty="0"/>
+              <a:t>기록</a:t>
+            </a:r>
+            <a:r>
+              <a:rPr lang="en-US" altLang="ko-KR" sz="1400" dirty="0"/>
+              <a:t>.</a:t>
+            </a:r>
+          </a:p>
+          <a:p>
+            <a:pPr>
+              <a:buFont typeface="Arial" panose="020B0604020202020204" pitchFamily="34" charset="0"/>
+              <a:buChar char="•"/>
+            </a:pPr>
+            <a:r>
+              <a:rPr lang="ko-KR" altLang="en-US" sz="1400" b="1" dirty="0"/>
+              <a:t>학습 안정성</a:t>
+            </a:r>
+            <a:r>
+              <a:rPr lang="en-US" altLang="ko-KR" sz="1400" b="1" dirty="0"/>
+              <a:t>:</a:t>
+            </a:r>
+            <a:r>
+              <a:rPr lang="ko-KR" altLang="en-US" sz="1400" dirty="0"/>
+              <a:t> </a:t>
+            </a:r>
+            <a:r>
+              <a:rPr lang="ko-KR" altLang="en-US" sz="1400" dirty="0" err="1"/>
+              <a:t>학습률과</a:t>
+            </a:r>
+            <a:r>
+              <a:rPr lang="ko-KR" altLang="en-US" sz="1400" dirty="0"/>
+              <a:t> 탐색 확률 변화에도 최종 </a:t>
+            </a:r>
+            <a:r>
+              <a:rPr lang="en-US" altLang="ko-KR" sz="1400" dirty="0"/>
+              <a:t>Greedy </a:t>
+            </a:r>
+            <a:r>
+              <a:rPr lang="ko-KR" altLang="en-US" sz="1400" dirty="0"/>
+              <a:t>평가 성능이 동일하게 나타남</a:t>
+            </a:r>
+            <a:r>
+              <a:rPr lang="en-US" altLang="ko-KR" sz="1400" dirty="0"/>
+              <a:t>.</a:t>
+            </a:r>
+          </a:p>
+          <a:p>
+            <a:pPr>
+              <a:buFont typeface="Arial" panose="020B0604020202020204" pitchFamily="34" charset="0"/>
+              <a:buChar char="•"/>
+            </a:pPr>
+            <a:r>
+              <a:rPr lang="ko-KR" altLang="en-US" sz="1400" b="1" dirty="0"/>
+              <a:t>분석</a:t>
+            </a:r>
+            <a:r>
+              <a:rPr lang="en-US" altLang="ko-KR" sz="1400" b="1" dirty="0"/>
+              <a:t>:</a:t>
+            </a:r>
+            <a:r>
+              <a:rPr lang="ko-KR" altLang="en-US" sz="1400" dirty="0"/>
+              <a:t> 모든 파라미터 조합에서 높은 최종 정책 성능을 확보</a:t>
+            </a:r>
+            <a:r>
+              <a:rPr lang="en-US" altLang="ko-KR" sz="1400" dirty="0"/>
+              <a:t>. </a:t>
+            </a:r>
+            <a:r>
+              <a:rPr lang="ko-KR" altLang="en-US" sz="1400" dirty="0"/>
+              <a:t>해당 </a:t>
+            </a:r>
+            <a:r>
+              <a:rPr lang="en-US" altLang="ko-KR" sz="1400" dirty="0" err="1"/>
+              <a:t>GridWorld</a:t>
+            </a:r>
+            <a:r>
+              <a:rPr lang="en-US" altLang="ko-KR" sz="1400" dirty="0"/>
+              <a:t> </a:t>
+            </a:r>
+            <a:r>
+              <a:rPr lang="ko-KR" altLang="en-US" sz="1400" dirty="0"/>
+              <a:t>환경에서 안정적인 학습 결과를 확인함</a:t>
+            </a:r>
+            <a:r>
+              <a:rPr lang="en-US" altLang="ko-KR" sz="1400" dirty="0"/>
+              <a:t>.</a:t>
+            </a:r>
+          </a:p>
+        </p:txBody>
+      </p:sp>
+    </p:spTree>
+    <p:extLst>
+      <p:ext uri="{BB962C8B-B14F-4D97-AF65-F5344CB8AC3E}">
+        <p14:creationId xmlns:p14="http://schemas.microsoft.com/office/powerpoint/2010/main" val="755901126"/>
+      </p:ext>
+    </p:extLst>
+  </p:cSld>
+  <p:clrMapOvr>
+    <a:masterClrMapping/>
+  </p:clrMapOvr>
+</p:sld>
+</file>
+
+<file path=ppt/slides/slide12.xml><?xml version="1.0" encoding="utf-8"?>
+<p:sld xmlns:a="http://schemas.openxmlformats.org/drawingml/2006/main" xmlns:r="http://schemas.openxmlformats.org/officeDocument/2006/relationships" xmlns:p="http://schemas.openxmlformats.org/presentationml/2006/main">
+  <p:cSld>
+    <p:spTree>
+      <p:nvGrpSpPr>
+        <p:cNvPr id="1" name=""/>
+        <p:cNvGrpSpPr/>
+        <p:nvPr/>
+      </p:nvGrpSpPr>
+      <p:grpSpPr>
+        <a:xfrm>
+          <a:off x="0" y="0"/>
+          <a:ext cx="0" cy="0"/>
+          <a:chOff x="0" y="0"/>
+          <a:chExt cx="0" cy="0"/>
+        </a:xfrm>
+      </p:grpSpPr>
+      <p:sp>
+        <p:nvSpPr>
+          <p:cNvPr id="2" name="제목 1">
+            <a:extLst>
+              <a:ext uri="{FF2B5EF4-FFF2-40B4-BE49-F238E27FC236}">
+                <a16:creationId xmlns:a16="http://schemas.microsoft.com/office/drawing/2014/main" id="{4F5A8108-ED05-C8B3-538C-B61C977CDB8A}"/>
+              </a:ext>
+            </a:extLst>
+          </p:cNvPr>
+          <p:cNvSpPr>
+            <a:spLocks noGrp="1"/>
+          </p:cNvSpPr>
+          <p:nvPr>
+            <p:ph type="title"/>
+          </p:nvPr>
+        </p:nvSpPr>
+        <p:spPr/>
+        <p:txBody>
+          <a:bodyPr/>
+          <a:lstStyle/>
+          <a:p>
+            <a:r>
+              <a:rPr lang="ko-KR" altLang="en-US" dirty="0"/>
+              <a:t>과제 결과</a:t>
+            </a:r>
+          </a:p>
+        </p:txBody>
+      </p:sp>
+      <p:sp>
+        <p:nvSpPr>
+          <p:cNvPr id="3" name="내용 개체 틀 2">
+            <a:extLst>
+              <a:ext uri="{FF2B5EF4-FFF2-40B4-BE49-F238E27FC236}">
+                <a16:creationId xmlns:a16="http://schemas.microsoft.com/office/drawing/2014/main" id="{E7C4356A-B9C5-EDE9-1DDC-9DA3BC6B9B9A}"/>
+              </a:ext>
+            </a:extLst>
+          </p:cNvPr>
+          <p:cNvSpPr>
+            <a:spLocks noGrp="1"/>
+          </p:cNvSpPr>
+          <p:nvPr>
+            <p:ph idx="1"/>
+          </p:nvPr>
+        </p:nvSpPr>
+        <p:spPr/>
+        <p:txBody>
+          <a:bodyPr/>
+          <a:lstStyle/>
+          <a:p>
+            <a:pPr marL="514350" indent="-514350">
+              <a:buFont typeface="+mj-lt"/>
+              <a:buAutoNum type="arabicPeriod"/>
+            </a:pPr>
+            <a:r>
+              <a:rPr lang="en-US" altLang="ko-KR" b="1" dirty="0"/>
+              <a:t>SARAS</a:t>
+            </a:r>
+          </a:p>
+          <a:p>
+            <a:pPr lvl="1"/>
+            <a:r>
+              <a:rPr lang="en-US" altLang="ko-KR" sz="1800" dirty="0"/>
+              <a:t>Alpha</a:t>
+            </a:r>
+            <a:r>
+              <a:rPr lang="ko-KR" altLang="en-US" sz="1800" dirty="0"/>
+              <a:t>가 </a:t>
+            </a:r>
+            <a:r>
+              <a:rPr lang="en-US" altLang="ko-KR" sz="1800" dirty="0"/>
+              <a:t>0.1</a:t>
+            </a:r>
+            <a:r>
+              <a:rPr lang="ko-KR" altLang="en-US" sz="1800" dirty="0"/>
+              <a:t>에서 </a:t>
+            </a:r>
+            <a:r>
+              <a:rPr lang="en-US" altLang="ko-KR" sz="1800" dirty="0"/>
+              <a:t>0.8</a:t>
+            </a:r>
+            <a:r>
+              <a:rPr lang="ko-KR" altLang="en-US" sz="1800" dirty="0"/>
+              <a:t>로 증가함에 따라 평균 학습 보상이 </a:t>
+            </a:r>
+            <a:r>
+              <a:rPr lang="en-US" altLang="ko-KR" sz="1800" dirty="0"/>
+              <a:t>0.405</a:t>
+            </a:r>
+            <a:r>
+              <a:rPr lang="ko-KR" altLang="en-US" sz="1800" dirty="0"/>
+              <a:t>에서 </a:t>
+            </a:r>
+            <a:r>
+              <a:rPr lang="en-US" altLang="ko-KR" sz="1800" dirty="0"/>
+              <a:t>0.304</a:t>
+            </a:r>
+            <a:r>
+              <a:rPr lang="ko-KR" altLang="en-US" sz="1800" dirty="0"/>
+              <a:t>로 감소함</a:t>
+            </a:r>
+            <a:r>
+              <a:rPr lang="en-US" altLang="ko-KR" sz="1800" dirty="0"/>
+              <a:t>. Epsilon </a:t>
+            </a:r>
+            <a:r>
+              <a:rPr lang="ko-KR" altLang="en-US" sz="1800" dirty="0"/>
+              <a:t>증가에 따라 학습 보상이 감소하며</a:t>
+            </a:r>
+            <a:r>
+              <a:rPr lang="en-US" altLang="ko-KR" sz="1800" dirty="0"/>
+              <a:t>, </a:t>
+            </a:r>
+            <a:r>
+              <a:rPr lang="ko-KR" altLang="en-US" sz="1800" dirty="0"/>
+              <a:t>높은 </a:t>
+            </a:r>
+            <a:r>
+              <a:rPr lang="en-US" altLang="ko-KR" sz="1800" dirty="0"/>
+              <a:t>Alpha, Epsilon </a:t>
+            </a:r>
+            <a:r>
+              <a:rPr lang="ko-KR" altLang="en-US" sz="1800" dirty="0"/>
+              <a:t>조합에서는 </a:t>
+            </a:r>
+            <a:r>
+              <a:rPr lang="en-US" altLang="ko-KR" sz="1800" dirty="0"/>
+              <a:t>Greedy </a:t>
+            </a:r>
+            <a:r>
+              <a:rPr lang="ko-KR" altLang="en-US" sz="1800" dirty="0"/>
+              <a:t>정책의 목표 도달 실패 발생</a:t>
+            </a:r>
+            <a:r>
+              <a:rPr lang="en-US" altLang="ko-KR" sz="1800" dirty="0"/>
+              <a:t>.</a:t>
+            </a:r>
+          </a:p>
+          <a:p>
+            <a:pPr lvl="1"/>
+            <a:r>
+              <a:rPr lang="ko-KR" altLang="en-US" sz="1800" dirty="0"/>
+              <a:t>이는 실제로 선택한 다음 행동의 </a:t>
+            </a:r>
+            <a:r>
+              <a:rPr lang="en-US" altLang="ko-KR" sz="1800" dirty="0"/>
+              <a:t>Q-Value</a:t>
+            </a:r>
+            <a:r>
+              <a:rPr lang="ko-KR" altLang="en-US" sz="1800" dirty="0"/>
+              <a:t>를 업데이트에 반영하는 </a:t>
+            </a:r>
+            <a:r>
+              <a:rPr lang="en-US" altLang="ko-KR" sz="1800" dirty="0"/>
+              <a:t>On-Policy </a:t>
+            </a:r>
+            <a:r>
+              <a:rPr lang="ko-KR" altLang="en-US" sz="1800" dirty="0"/>
+              <a:t>특성과 </a:t>
+            </a:r>
+            <a:r>
+              <a:rPr lang="ko-KR" altLang="en-US" sz="1800" dirty="0" err="1"/>
+              <a:t>관련있는</a:t>
+            </a:r>
+            <a:r>
+              <a:rPr lang="ko-KR" altLang="en-US" sz="1800" dirty="0"/>
+              <a:t> 것으로 분석됨</a:t>
+            </a:r>
+            <a:r>
+              <a:rPr lang="en-US" altLang="ko-KR" sz="1800" dirty="0"/>
+              <a:t>.</a:t>
+            </a:r>
+          </a:p>
+          <a:p>
+            <a:pPr marL="514350" indent="-514350">
+              <a:buFont typeface="+mj-lt"/>
+              <a:buAutoNum type="arabicPeriod"/>
+            </a:pPr>
+            <a:r>
+              <a:rPr lang="en-US" altLang="ko-KR" b="1" dirty="0"/>
+              <a:t>Q-Learning</a:t>
+            </a:r>
+          </a:p>
+          <a:p>
+            <a:pPr lvl="1"/>
+            <a:r>
+              <a:rPr lang="en-US" altLang="ko-KR" sz="1800" dirty="0"/>
+              <a:t>Alpha </a:t>
+            </a:r>
+            <a:r>
+              <a:rPr lang="ko-KR" altLang="en-US" sz="1800" dirty="0"/>
+              <a:t>변화에도 평균 학습 보상이 </a:t>
+            </a:r>
+            <a:r>
+              <a:rPr lang="en-US" altLang="ko-KR" sz="1800" dirty="0"/>
+              <a:t>0.411~0.417</a:t>
+            </a:r>
+            <a:r>
+              <a:rPr lang="ko-KR" altLang="en-US" sz="1800" dirty="0"/>
+              <a:t>로 일정하게 유지</a:t>
+            </a:r>
+            <a:r>
+              <a:rPr lang="en-US" altLang="ko-KR" sz="1800" dirty="0"/>
+              <a:t>. Epsilon </a:t>
+            </a:r>
+            <a:r>
+              <a:rPr lang="ko-KR" altLang="en-US" sz="1800" dirty="0"/>
+              <a:t>증가에 따라 학습 중 보상은 감소하였지만</a:t>
+            </a:r>
+            <a:r>
+              <a:rPr lang="en-US" altLang="ko-KR" sz="1800" dirty="0"/>
+              <a:t>, </a:t>
+            </a:r>
+            <a:r>
+              <a:rPr lang="ko-KR" altLang="en-US" sz="1800" dirty="0"/>
+              <a:t>모든 파라미터 조합에서 </a:t>
+            </a:r>
+            <a:r>
+              <a:rPr lang="en-US" altLang="ko-KR" sz="1800" dirty="0"/>
+              <a:t>Greedy </a:t>
+            </a:r>
+            <a:r>
+              <a:rPr lang="ko-KR" altLang="en-US" sz="1800" dirty="0"/>
+              <a:t>평가 보상 </a:t>
+            </a:r>
+            <a:r>
+              <a:rPr lang="en-US" altLang="ko-KR" sz="1800" dirty="0"/>
+              <a:t>0.478</a:t>
+            </a:r>
+            <a:r>
+              <a:rPr lang="ko-KR" altLang="en-US" sz="1800" dirty="0"/>
+              <a:t>을 기록하며 </a:t>
+            </a:r>
+            <a:r>
+              <a:rPr lang="en-US" altLang="ko-KR" sz="1800" dirty="0"/>
+              <a:t>8 Step</a:t>
+            </a:r>
+            <a:r>
+              <a:rPr lang="ko-KR" altLang="en-US" sz="1800" dirty="0"/>
+              <a:t>으로 목표 도달</a:t>
+            </a:r>
+            <a:r>
+              <a:rPr lang="en-US" altLang="ko-KR" sz="1800" dirty="0"/>
+              <a:t>.</a:t>
+            </a:r>
+          </a:p>
+          <a:p>
+            <a:pPr lvl="1"/>
+            <a:r>
+              <a:rPr lang="ko-KR" altLang="en-US" sz="1800" dirty="0"/>
+              <a:t>다음 상태의 최대 </a:t>
+            </a:r>
+            <a:r>
+              <a:rPr lang="en-US" altLang="ko-KR" sz="1800" dirty="0"/>
+              <a:t>Q-Value</a:t>
+            </a:r>
+            <a:r>
+              <a:rPr lang="ko-KR" altLang="en-US" sz="1800" dirty="0"/>
+              <a:t>를 사용하는 </a:t>
+            </a:r>
+            <a:r>
+              <a:rPr lang="en-US" altLang="ko-KR" sz="1800" dirty="0"/>
+              <a:t>Off-Policy </a:t>
+            </a:r>
+            <a:r>
+              <a:rPr lang="ko-KR" altLang="en-US" sz="1800" dirty="0"/>
+              <a:t>업데이트 특성이 이번 실험의 안정적 최종 평가 성능에 기여한 것으로 해석됨</a:t>
+            </a:r>
+            <a:endParaRPr lang="en-US" altLang="ko-KR" sz="1800" dirty="0"/>
+          </a:p>
+        </p:txBody>
+      </p:sp>
+    </p:spTree>
+    <p:extLst>
+      <p:ext uri="{BB962C8B-B14F-4D97-AF65-F5344CB8AC3E}">
+        <p14:creationId xmlns:p14="http://schemas.microsoft.com/office/powerpoint/2010/main" val="2170711995"/>
+      </p:ext>
+    </p:extLst>
+  </p:cSld>
+  <p:clrMapOvr>
+    <a:masterClrMapping/>
+  </p:clrMapOvr>
+</p:sld>
+</file>
+
 <file path=ppt/slides/slide2.xml><?xml version="1.0" encoding="utf-8"?>
 <p:sld xmlns:a="http://schemas.openxmlformats.org/drawingml/2006/main" xmlns:r="http://schemas.openxmlformats.org/officeDocument/2006/relationships" xmlns:p="http://schemas.openxmlformats.org/presentationml/2006/main">
   <p:cSld>
@@ -4879,7 +6430,7 @@
             </p:spPr>
             <p:txBody>
               <a:bodyPr>
-                <a:normAutofit/>
+                <a:normAutofit lnSpcReduction="10000"/>
               </a:bodyPr>
               <a:lstStyle/>
               <a:p>
@@ -4895,7 +6446,7 @@
                 <a:pPr lvl="1"/>
                 <a:r>
                   <a:rPr lang="ko-KR" altLang="en-US" sz="2000" dirty="0"/>
-                  <a:t>강화학습에서 환경에 대한 사전 정보 없이 직접 경험을 통해 학습하는 </a:t>
+                  <a:t>환경에 대한 사전 정보 없이 직접 경험을 통해 학습하는 </a:t>
                 </a:r>
                 <a:r>
                   <a:rPr lang="en-US" altLang="ko-KR" sz="2000" dirty="0"/>
@@ -4903,11 +6454,11 @@
                 </a:r>
                 <a:r>
                   <a:rPr lang="ko-KR" altLang="en-US" sz="2000" dirty="0"/>
-                  <a:t>방식이면서</a:t>
+                  <a:t>방식</a:t>
                 </a:r>
                 <a:r>
                   <a:rPr lang="en-US" altLang="ko-KR" sz="2000" dirty="0"/>
-                  <a:t>, </a:t>
+                  <a:t>. </a:t>
                 </a:r>
                 <a:r>
                   <a:rPr lang="ko-KR" altLang="en-US" sz="2000" dirty="0"/>
@@ -5299,13 +6850,7 @@
                       <a:rPr lang="en-US" altLang="ko-KR" sz="2000" b="0" i="1" smtClean="0">
                         <a:latin typeface="Cambria Math" panose="02040503050406030204" pitchFamily="18" charset="0"/>
                       </a:rPr>
-                      <m:t>)</m:t>
-                    </m:r>
-                    <m:r>
-                      <a:rPr lang="en-US" altLang="ko-KR" sz="2000" b="0" i="1" smtClean="0">
-                        <a:latin typeface="Cambria Math" panose="02040503050406030204" pitchFamily="18" charset="0"/>
-                      </a:rPr>
-                      <m:t>−</m:t>
+                      <m:t>)−</m:t>
                     </m:r>
                     <m:sSub>
                       <m:sSubPr>
@@ -5412,6 +6957,18 @@
               </a:p>
               <a:p>
                 <a:pPr lvl="1"/>
+                <a:r>
+                  <a:rPr lang="en-US" altLang="ko-KR" sz="2000" dirty="0"/>
+                  <a:t>Off Policy </a:t>
+                </a:r>
+                <a:r>
+                  <a:rPr lang="ko-KR" altLang="en-US" sz="2000" dirty="0"/>
+                  <a:t>정책</a:t>
+                </a:r>
+                <a:r>
+                  <a:rPr lang="en-US" altLang="ko-KR" sz="2000" dirty="0"/>
+                  <a:t>. </a:t>
+                </a:r>
                 <a:r>
                   <a:rPr lang="ko-KR" altLang="en-US" sz="2000" dirty="0"/>
                   <a:t>실제 다음 행동과 무관하게</a:t>
@@ -5876,7 +7433,7 @@
               <a:blipFill>
                 <a:blip r:embed="rId2"/>
                 <a:stretch>
-                  <a:fillRect l="-1217" t="-2525" r="-116" b="-701"/>
+                  <a:fillRect l="-1217" t="-3506"/>
                 </a:stretch>
               </a:blipFill>
             </p:spPr>
@@ -6000,12 +7557,210 @@
             </a:r>
             <a:r>
               <a:rPr lang="en-US" altLang="ko-KR" b="1" dirty="0"/>
-              <a:t>Method - SARAS</a:t>
-            </a:r>
-            <a:endParaRPr lang="ko-KR" altLang="en-US" b="1" dirty="0"/>
+              <a:t>Method – SARSA</a:t>
+            </a:r>
+          </a:p>
+          <a:p>
+            <a:pPr marL="0" indent="0">
+              <a:buNone/>
+            </a:pPr>
+            <a:r>
+              <a:rPr lang="ko-KR" altLang="en-US" sz="1400" b="0" dirty="0">
+                <a:latin typeface="맑은 고딕"/>
+              </a:rPr>
+              <a:t>기준 실험 </a:t>
+            </a:r>
+            <a:r>
+              <a:rPr lang="el-GR" altLang="ko-KR" sz="1400" b="0" dirty="0">
+                <a:latin typeface="맑은 고딕"/>
+              </a:rPr>
+              <a:t>α=0.8  ·  ε=0.1  ·  γ=0.9  ·  10,000 </a:t>
+            </a:r>
+            <a:r>
+              <a:rPr lang="en-US" altLang="ko-KR" sz="1400" b="0" dirty="0">
+                <a:latin typeface="맑은 고딕"/>
+              </a:rPr>
+              <a:t>episodes</a:t>
+            </a:r>
           </a:p>
         </p:txBody>
       </p:sp>
+      <p:graphicFrame>
+        <p:nvGraphicFramePr>
+          <p:cNvPr id="4" name="표 3">
+            <a:extLst>
+              <a:ext uri="{FF2B5EF4-FFF2-40B4-BE49-F238E27FC236}">
+                <a16:creationId xmlns:a16="http://schemas.microsoft.com/office/drawing/2014/main" id="{30F690BE-749A-F6D0-38C3-B0662AA4D867}"/>
+              </a:ext>
+            </a:extLst>
+          </p:cNvPr>
+          <p:cNvGraphicFramePr>
+            <a:graphicFrameLocks noGrp="1"/>
+          </p:cNvGraphicFramePr>
+          <p:nvPr>
+            <p:extLst>
+              <p:ext uri="{D42A27DB-BD31-4B8C-83A1-F6EECF244321}">
+                <p14:modId xmlns:p14="http://schemas.microsoft.com/office/powerpoint/2010/main" val="2681242460"/>
+              </p:ext>
+            </p:extLst>
+          </p:nvPr>
+        </p:nvGraphicFramePr>
+        <p:xfrm>
+          <a:off x="744279" y="2789468"/>
+          <a:ext cx="10703442" cy="741680"/>
+        </p:xfrm>
+        <a:graphic>
+          <a:graphicData uri="http://schemas.openxmlformats.org/drawingml/2006/table">
+            <a:tbl>
+              <a:tblPr firstRow="1" bandRow="1">
+                <a:tableStyleId>{2D5ABB26-0587-4C30-8999-92F81FD0307C}</a:tableStyleId>
+              </a:tblPr>
+              <a:tblGrid>
+                <a:gridCol w="5351721">
+                  <a:extLst>
+                    <a:ext uri="{9D8B030D-6E8A-4147-A177-3AD203B41FA5}">
+                      <a16:colId xmlns:a16="http://schemas.microsoft.com/office/drawing/2014/main" val="4045138800"/>
+                    </a:ext>
+                  </a:extLst>
+                </a:gridCol>
+                <a:gridCol w="5351721">
+                  <a:extLst>
+                    <a:ext uri="{9D8B030D-6E8A-4147-A177-3AD203B41FA5}">
+                      <a16:colId xmlns:a16="http://schemas.microsoft.com/office/drawing/2014/main" val="877522094"/>
+                    </a:ext>
+                  </a:extLst>
+                </a:gridCol>
+              </a:tblGrid>
+              <a:tr h="370840">
+                <a:tc>
+                  <a:txBody>
+                    <a:bodyPr/>
+                    <a:lstStyle/>
+                    <a:p>
+                      <a:pPr algn="ctr" latinLnBrk="1"/>
+                      <a:r>
+                        <a:rPr lang="en-US" altLang="ko-KR" b="1" dirty="0"/>
+                        <a:t>Q-Value</a:t>
+                      </a:r>
+                      <a:endParaRPr lang="ko-KR" altLang="en-US" b="1" dirty="0"/>
+                    </a:p>
+                  </a:txBody>
+                  <a:tcPr/>
+                </a:tc>
+                <a:tc>
+                  <a:txBody>
+                    <a:bodyPr/>
+                    <a:lstStyle/>
+                    <a:p>
+                      <a:pPr algn="ctr" latinLnBrk="1"/>
+                      <a:r>
+                        <a:rPr lang="en-US" altLang="ko-KR" b="1" dirty="0"/>
+                        <a:t>Greedy Policy</a:t>
+                      </a:r>
+                      <a:endParaRPr lang="ko-KR" altLang="en-US" b="1" dirty="0"/>
+                    </a:p>
+                  </a:txBody>
+                  <a:tcPr/>
+                </a:tc>
+                <a:extLst>
+                  <a:ext uri="{0D108BD9-81ED-4DB2-BD59-A6C34878D82A}">
+                    <a16:rowId xmlns:a16="http://schemas.microsoft.com/office/drawing/2014/main" val="2569930744"/>
+                  </a:ext>
+                </a:extLst>
+              </a:tr>
+              <a:tr h="370840">
+                <a:tc>
+                  <a:txBody>
+                    <a:bodyPr/>
+                    <a:lstStyle/>
+                    <a:p>
+                      <a:pPr latinLnBrk="1"/>
+                      <a:endParaRPr lang="ko-KR" altLang="en-US" dirty="0"/>
+                    </a:p>
+                  </a:txBody>
+                  <a:tcPr/>
+                </a:tc>
+                <a:tc>
+                  <a:txBody>
+                    <a:bodyPr/>
+                    <a:lstStyle/>
+                    <a:p>
+                      <a:pPr latinLnBrk="1"/>
+                      <a:endParaRPr lang="ko-KR" altLang="en-US" dirty="0"/>
+                    </a:p>
+                  </a:txBody>
+                  <a:tcPr/>
+                </a:tc>
+                <a:extLst>
+                  <a:ext uri="{0D108BD9-81ED-4DB2-BD59-A6C34878D82A}">
+                    <a16:rowId xmlns:a16="http://schemas.microsoft.com/office/drawing/2014/main" val="471399227"/>
+                  </a:ext>
+                </a:extLst>
+              </a:tr>
+            </a:tbl>
+          </a:graphicData>
+        </a:graphic>
+      </p:graphicFrame>
+      <p:pic>
+        <p:nvPicPr>
+          <p:cNvPr id="8" name="그림 7">
+            <a:extLst>
+              <a:ext uri="{FF2B5EF4-FFF2-40B4-BE49-F238E27FC236}">
+                <a16:creationId xmlns:a16="http://schemas.microsoft.com/office/drawing/2014/main" id="{01F7B0CA-832B-E3DC-9A00-9010A5A88236}"/>
+              </a:ext>
+            </a:extLst>
+          </p:cNvPr>
+          <p:cNvPicPr>
+            <a:picLocks noChangeAspect="1"/>
+          </p:cNvPicPr>
+          <p:nvPr/>
+        </p:nvPicPr>
+        <p:blipFill>
+          <a:blip r:embed="rId2"/>
+          <a:stretch>
+            <a:fillRect/>
+          </a:stretch>
+        </p:blipFill>
+        <p:spPr>
+          <a:xfrm>
+            <a:off x="1245085" y="3072964"/>
+            <a:ext cx="4100340" cy="2991729"/>
+          </a:xfrm>
+          <a:prstGeom prst="rect">
+            <a:avLst/>
+          </a:prstGeom>
+        </p:spPr>
+      </p:pic>
+      <p:pic>
+        <p:nvPicPr>
+          <p:cNvPr id="10" name="그림 9">
+            <a:extLst>
+              <a:ext uri="{FF2B5EF4-FFF2-40B4-BE49-F238E27FC236}">
+                <a16:creationId xmlns:a16="http://schemas.microsoft.com/office/drawing/2014/main" id="{6357C024-1E62-53BB-785A-7C4AD7CFB414}"/>
+              </a:ext>
+            </a:extLst>
+          </p:cNvPr>
+          <p:cNvPicPr>
+            <a:picLocks noChangeAspect="1"/>
+          </p:cNvPicPr>
+          <p:nvPr/>
+        </p:nvPicPr>
+        <p:blipFill>
+          <a:blip r:embed="rId3"/>
+          <a:stretch>
+            <a:fillRect/>
+          </a:stretch>
+        </p:blipFill>
+        <p:spPr>
+          <a:xfrm>
+            <a:off x="7200902" y="3103308"/>
+            <a:ext cx="3875820" cy="2931042"/>
+          </a:xfrm>
+          <a:prstGeom prst="rect">
+            <a:avLst/>
+          </a:prstGeom>
+        </p:spPr>
+      </p:pic>
     </p:spTree>
     <p:extLst>
       <p:ext uri="{BB962C8B-B14F-4D97-AF65-F5344CB8AC3E}">
@@ -6082,8 +7837,8 @@
         </p:nvSpPr>
         <p:spPr>
           <a:xfrm>
-            <a:off x="838200" y="1825625"/>
-            <a:ext cx="8305800" cy="4351338"/>
+            <a:off x="838199" y="1825625"/>
+            <a:ext cx="8936665" cy="4351338"/>
           </a:xfrm>
         </p:spPr>
         <p:txBody>
@@ -6111,12 +7866,342 @@
             </a:r>
             <a:r>
               <a:rPr lang="en-US" altLang="ko-KR" b="1" dirty="0"/>
-              <a:t>Method - SARAS</a:t>
-            </a:r>
-            <a:endParaRPr lang="ko-KR" altLang="en-US" b="1" dirty="0"/>
+              <a:t>Method – SARSA | </a:t>
+            </a:r>
+            <a:r>
+              <a:rPr lang="ko-KR" altLang="en-US" b="1" dirty="0"/>
+              <a:t>학습 곡선</a:t>
+            </a:r>
+            <a:endParaRPr lang="en-US" altLang="ko-KR" b="1" dirty="0"/>
+          </a:p>
+          <a:p>
+            <a:pPr marL="0" indent="0">
+              <a:buNone/>
+            </a:pPr>
+            <a:r>
+              <a:rPr lang="en-US" altLang="ko-KR" sz="1400" b="0" dirty="0">
+                <a:solidFill>
+                  <a:srgbClr val="76808A"/>
+                </a:solidFill>
+                <a:latin typeface="맑은 고딕"/>
+              </a:rPr>
+              <a:t>10,000</a:t>
+            </a:r>
+            <a:r>
+              <a:rPr lang="ko-KR" altLang="en-US" sz="1400" b="0" dirty="0">
+                <a:solidFill>
+                  <a:srgbClr val="76808A"/>
+                </a:solidFill>
+                <a:latin typeface="맑은 고딕"/>
+              </a:rPr>
+              <a:t>회 학습 </a:t>
+            </a:r>
+            <a:r>
+              <a:rPr lang="en-US" altLang="ko-KR" sz="1400" b="0" dirty="0">
+                <a:solidFill>
+                  <a:srgbClr val="76808A"/>
+                </a:solidFill>
+                <a:latin typeface="맑은 고딕"/>
+              </a:rPr>
+              <a:t>· </a:t>
+            </a:r>
+            <a:r>
+              <a:rPr lang="ko-KR" altLang="en-US" sz="1400" b="0" dirty="0">
+                <a:solidFill>
+                  <a:srgbClr val="76808A"/>
+                </a:solidFill>
+                <a:latin typeface="맑은 고딕"/>
+              </a:rPr>
+              <a:t>보상 </a:t>
+            </a:r>
+            <a:r>
+              <a:rPr lang="en-US" altLang="ko-KR" sz="1400" b="0" dirty="0">
+                <a:solidFill>
+                  <a:srgbClr val="76808A"/>
+                </a:solidFill>
+                <a:latin typeface="맑은 고딕"/>
+              </a:rPr>
+              <a:t>/ </a:t>
+            </a:r>
+            <a:r>
+              <a:rPr lang="ko-KR" altLang="en-US" sz="1400" b="0" dirty="0">
+                <a:solidFill>
+                  <a:srgbClr val="76808A"/>
+                </a:solidFill>
+                <a:latin typeface="맑은 고딕"/>
+              </a:rPr>
+              <a:t>스텝 </a:t>
+            </a:r>
+            <a:r>
+              <a:rPr lang="en-US" altLang="ko-KR" sz="1400" b="0" dirty="0">
+                <a:solidFill>
+                  <a:srgbClr val="76808A"/>
+                </a:solidFill>
+                <a:latin typeface="맑은 고딕"/>
+              </a:rPr>
+              <a:t>/ </a:t>
+            </a:r>
+            <a:r>
+              <a:rPr lang="ko-KR" altLang="en-US" sz="1400" b="0" dirty="0">
+                <a:solidFill>
+                  <a:srgbClr val="76808A"/>
+                </a:solidFill>
+                <a:latin typeface="맑은 고딕"/>
+              </a:rPr>
+              <a:t>종료 성공률 </a:t>
+            </a:r>
+            <a:r>
+              <a:rPr lang="en-US" altLang="ko-KR" sz="1400" b="0" dirty="0">
+                <a:solidFill>
+                  <a:srgbClr val="76808A"/>
+                </a:solidFill>
+                <a:latin typeface="맑은 고딕"/>
+              </a:rPr>
+              <a:t>· 100-episode </a:t>
+            </a:r>
+            <a:r>
+              <a:rPr lang="ko-KR" altLang="en-US" sz="1400" b="0" dirty="0">
+                <a:solidFill>
+                  <a:srgbClr val="76808A"/>
+                </a:solidFill>
+                <a:latin typeface="맑은 고딕"/>
+              </a:rPr>
+              <a:t>이동평균</a:t>
+            </a:r>
           </a:p>
         </p:txBody>
       </p:sp>
+      <p:pic>
+        <p:nvPicPr>
+          <p:cNvPr id="5" name="그림 4">
+            <a:extLst>
+              <a:ext uri="{FF2B5EF4-FFF2-40B4-BE49-F238E27FC236}">
+                <a16:creationId xmlns:a16="http://schemas.microsoft.com/office/drawing/2014/main" id="{42EA6CDA-C911-EE26-219F-01DE458587DA}"/>
+              </a:ext>
+            </a:extLst>
+          </p:cNvPr>
+          <p:cNvPicPr>
+            <a:picLocks noChangeAspect="1"/>
+          </p:cNvPicPr>
+          <p:nvPr/>
+        </p:nvPicPr>
+        <p:blipFill>
+          <a:blip r:embed="rId2">
+            <a:extLst>
+              <a:ext uri="{28A0092B-C50C-407E-A947-70E740481C1C}">
+                <a14:useLocalDpi xmlns:a14="http://schemas.microsoft.com/office/drawing/2010/main" val="0"/>
+              </a:ext>
+            </a:extLst>
+          </a:blip>
+          <a:stretch>
+            <a:fillRect/>
+          </a:stretch>
+        </p:blipFill>
+        <p:spPr>
+          <a:xfrm>
+            <a:off x="900223" y="2615753"/>
+            <a:ext cx="10391554" cy="2771082"/>
+          </a:xfrm>
+          <a:prstGeom prst="rect">
+            <a:avLst/>
+          </a:prstGeom>
+        </p:spPr>
+      </p:pic>
+      <p:graphicFrame>
+        <p:nvGraphicFramePr>
+          <p:cNvPr id="6" name="표 5">
+            <a:extLst>
+              <a:ext uri="{FF2B5EF4-FFF2-40B4-BE49-F238E27FC236}">
+                <a16:creationId xmlns:a16="http://schemas.microsoft.com/office/drawing/2014/main" id="{44D28236-6767-233F-25C0-5463903E9DAC}"/>
+              </a:ext>
+            </a:extLst>
+          </p:cNvPr>
+          <p:cNvGraphicFramePr>
+            <a:graphicFrameLocks noGrp="1"/>
+          </p:cNvGraphicFramePr>
+          <p:nvPr>
+            <p:extLst>
+              <p:ext uri="{D42A27DB-BD31-4B8C-83A1-F6EECF244321}">
+                <p14:modId xmlns:p14="http://schemas.microsoft.com/office/powerpoint/2010/main" val="1979361873"/>
+              </p:ext>
+            </p:extLst>
+          </p:nvPr>
+        </p:nvGraphicFramePr>
+        <p:xfrm>
+          <a:off x="1259955" y="5443752"/>
+          <a:ext cx="10093845" cy="670560"/>
+        </p:xfrm>
+        <a:graphic>
+          <a:graphicData uri="http://schemas.openxmlformats.org/drawingml/2006/table">
+            <a:tbl>
+              <a:tblPr firstRow="1" bandRow="1">
+                <a:tableStyleId>{2D5ABB26-0587-4C30-8999-92F81FD0307C}</a:tableStyleId>
+              </a:tblPr>
+              <a:tblGrid>
+                <a:gridCol w="3364615">
+                  <a:extLst>
+                    <a:ext uri="{9D8B030D-6E8A-4147-A177-3AD203B41FA5}">
+                      <a16:colId xmlns:a16="http://schemas.microsoft.com/office/drawing/2014/main" val="2869937718"/>
+                    </a:ext>
+                  </a:extLst>
+                </a:gridCol>
+                <a:gridCol w="3364615">
+                  <a:extLst>
+                    <a:ext uri="{9D8B030D-6E8A-4147-A177-3AD203B41FA5}">
+                      <a16:colId xmlns:a16="http://schemas.microsoft.com/office/drawing/2014/main" val="3799848100"/>
+                    </a:ext>
+                  </a:extLst>
+                </a:gridCol>
+                <a:gridCol w="3364615">
+                  <a:extLst>
+                    <a:ext uri="{9D8B030D-6E8A-4147-A177-3AD203B41FA5}">
+                      <a16:colId xmlns:a16="http://schemas.microsoft.com/office/drawing/2014/main" val="2848995611"/>
+                    </a:ext>
+                  </a:extLst>
+                </a:gridCol>
+              </a:tblGrid>
+              <a:tr h="264256">
+                <a:tc>
+                  <a:txBody>
+                    <a:bodyPr/>
+                    <a:lstStyle/>
+                    <a:p>
+                      <a:pPr algn="ctr" latinLnBrk="1"/>
+                      <a:r>
+                        <a:rPr lang="ko-KR" altLang="en-US" sz="1400" b="0" dirty="0"/>
+                        <a:t>마지막 </a:t>
+                      </a:r>
+                      <a:r>
+                        <a:rPr lang="en-US" altLang="ko-KR" sz="1400" b="0" dirty="0"/>
+                        <a:t>100</a:t>
+                      </a:r>
+                      <a:r>
+                        <a:rPr lang="ko-KR" altLang="en-US" sz="1400" b="0" dirty="0"/>
+                        <a:t>회 평균보상</a:t>
+                      </a:r>
+                    </a:p>
+                  </a:txBody>
+                  <a:tcPr/>
+                </a:tc>
+                <a:tc>
+                  <a:txBody>
+                    <a:bodyPr/>
+                    <a:lstStyle/>
+                    <a:p>
+                      <a:pPr algn="ctr" latinLnBrk="1"/>
+                      <a:r>
+                        <a:rPr lang="ko-KR" altLang="en-US" sz="1400" b="0" dirty="0"/>
+                        <a:t>마지막 </a:t>
+                      </a:r>
+                      <a:r>
+                        <a:rPr lang="en-US" altLang="ko-KR" sz="1400" b="0" dirty="0"/>
+                        <a:t>100</a:t>
+                      </a:r>
+                      <a:r>
+                        <a:rPr lang="ko-KR" altLang="en-US" sz="1400" b="0" dirty="0"/>
+                        <a:t>회 평균 </a:t>
+                      </a:r>
+                      <a:r>
+                        <a:rPr lang="en-US" altLang="ko-KR" sz="1400" b="0" dirty="0"/>
+                        <a:t>Step</a:t>
+                      </a:r>
+                      <a:endParaRPr lang="ko-KR" altLang="en-US" sz="1400" b="0" dirty="0"/>
+                    </a:p>
+                  </a:txBody>
+                  <a:tcPr/>
+                </a:tc>
+                <a:tc>
+                  <a:txBody>
+                    <a:bodyPr/>
+                    <a:lstStyle/>
+                    <a:p>
+                      <a:pPr algn="ctr" latinLnBrk="1"/>
+                      <a:r>
+                        <a:rPr lang="ko-KR" altLang="en-US" sz="1400" b="0" dirty="0"/>
+                        <a:t>마지막 </a:t>
+                      </a:r>
+                      <a:r>
+                        <a:rPr lang="en-US" altLang="ko-KR" sz="1400" b="0" dirty="0"/>
+                        <a:t>100</a:t>
+                      </a:r>
+                      <a:r>
+                        <a:rPr lang="ko-KR" altLang="en-US" sz="1400" b="0" dirty="0"/>
+                        <a:t>회</a:t>
+                      </a:r>
+                      <a:r>
+                        <a:rPr lang="en-US" altLang="ko-KR" sz="1400" b="0" dirty="0"/>
+                        <a:t> </a:t>
+                      </a:r>
+                      <a:r>
+                        <a:rPr lang="ko-KR" altLang="en-US" sz="1400" b="0" dirty="0"/>
+                        <a:t>종료 성공률</a:t>
+                      </a:r>
+                    </a:p>
+                  </a:txBody>
+                  <a:tcPr/>
+                </a:tc>
+                <a:extLst>
+                  <a:ext uri="{0D108BD9-81ED-4DB2-BD59-A6C34878D82A}">
+                    <a16:rowId xmlns:a16="http://schemas.microsoft.com/office/drawing/2014/main" val="943329619"/>
+                  </a:ext>
+                </a:extLst>
+              </a:tr>
+              <a:tr h="317108">
+                <a:tc>
+                  <a:txBody>
+                    <a:bodyPr/>
+                    <a:lstStyle/>
+                    <a:p>
+                      <a:pPr latinLnBrk="1"/>
+                      <a:r>
+                        <a:rPr lang="en-US" altLang="ko-KR" b="1" dirty="0"/>
+                        <a:t>0.358</a:t>
+                      </a:r>
+                      <a:endParaRPr lang="ko-KR" altLang="en-US" b="1" dirty="0"/>
+                    </a:p>
+                  </a:txBody>
+                  <a:tcPr/>
+                </a:tc>
+                <a:tc>
+                  <a:txBody>
+                    <a:bodyPr/>
+                    <a:lstStyle/>
+                    <a:p>
+                      <a:pPr latinLnBrk="1"/>
+                      <a:r>
+                        <a:rPr lang="en-US" altLang="ko-KR" b="1" dirty="0"/>
+                        <a:t>16.11</a:t>
+                      </a:r>
+                      <a:endParaRPr lang="ko-KR" altLang="en-US" b="1" dirty="0"/>
+                    </a:p>
+                  </a:txBody>
+                  <a:tcPr/>
+                </a:tc>
+                <a:tc>
+                  <a:txBody>
+                    <a:bodyPr/>
+                    <a:lstStyle/>
+                    <a:p>
+                      <a:pPr latinLnBrk="1"/>
+                      <a:r>
+                        <a:rPr lang="en-US" altLang="ko-KR" b="1" dirty="0"/>
+                        <a:t>98%</a:t>
+                      </a:r>
+                      <a:endParaRPr lang="ko-KR" altLang="en-US" b="1" dirty="0"/>
+                    </a:p>
+                  </a:txBody>
+                  <a:tcPr/>
+                </a:tc>
+                <a:extLst>
+                  <a:ext uri="{0D108BD9-81ED-4DB2-BD59-A6C34878D82A}">
+                    <a16:rowId xmlns:a16="http://schemas.microsoft.com/office/drawing/2014/main" val="751209890"/>
+                  </a:ext>
+                </a:extLst>
+              </a:tr>
+            </a:tbl>
+          </a:graphicData>
+        </a:graphic>
+      </p:graphicFrame>
     </p:spTree>
     <p:extLst>
       <p:ext uri="{BB962C8B-B14F-4D97-AF65-F5344CB8AC3E}">
@@ -6194,7 +8279,7 @@
         <p:spPr>
           <a:xfrm>
             <a:off x="838200" y="1825625"/>
-            <a:ext cx="7909560" cy="4351338"/>
+            <a:ext cx="9560442" cy="4351338"/>
           </a:xfrm>
         </p:spPr>
         <p:txBody>
@@ -6206,16 +8291,240 @@
             </a:pPr>
             <a:r>
               <a:rPr lang="en-US" altLang="ko-KR" b="1" dirty="0"/>
-              <a:t>Temporal Difference Method – Q-Learning</a:t>
+              <a:t>Temporal Difference Method – SARSA | Alpha, Epsilon</a:t>
             </a:r>
             <a:endParaRPr lang="ko-KR" altLang="en-US" b="1" dirty="0"/>
           </a:p>
         </p:txBody>
       </p:sp>
+      <p:graphicFrame>
+        <p:nvGraphicFramePr>
+          <p:cNvPr id="4" name="표 3">
+            <a:extLst>
+              <a:ext uri="{FF2B5EF4-FFF2-40B4-BE49-F238E27FC236}">
+                <a16:creationId xmlns:a16="http://schemas.microsoft.com/office/drawing/2014/main" id="{6AFE07DB-898A-46BD-127F-8AA150AFD879}"/>
+              </a:ext>
+            </a:extLst>
+          </p:cNvPr>
+          <p:cNvGraphicFramePr>
+            <a:graphicFrameLocks noGrp="1"/>
+          </p:cNvGraphicFramePr>
+          <p:nvPr>
+            <p:extLst>
+              <p:ext uri="{D42A27DB-BD31-4B8C-83A1-F6EECF244321}">
+                <p14:modId xmlns:p14="http://schemas.microsoft.com/office/powerpoint/2010/main" val="1804944123"/>
+              </p:ext>
+            </p:extLst>
+          </p:nvPr>
+        </p:nvGraphicFramePr>
+        <p:xfrm>
+          <a:off x="765543" y="2420875"/>
+          <a:ext cx="10660914" cy="741680"/>
+        </p:xfrm>
+        <a:graphic>
+          <a:graphicData uri="http://schemas.openxmlformats.org/drawingml/2006/table">
+            <a:tbl>
+              <a:tblPr firstRow="1" bandRow="1">
+                <a:tableStyleId>{2D5ABB26-0587-4C30-8999-92F81FD0307C}</a:tableStyleId>
+              </a:tblPr>
+              <a:tblGrid>
+                <a:gridCol w="3553638">
+                  <a:extLst>
+                    <a:ext uri="{9D8B030D-6E8A-4147-A177-3AD203B41FA5}">
+                      <a16:colId xmlns:a16="http://schemas.microsoft.com/office/drawing/2014/main" val="1865542858"/>
+                    </a:ext>
+                  </a:extLst>
+                </a:gridCol>
+                <a:gridCol w="3553638">
+                  <a:extLst>
+                    <a:ext uri="{9D8B030D-6E8A-4147-A177-3AD203B41FA5}">
+                      <a16:colId xmlns:a16="http://schemas.microsoft.com/office/drawing/2014/main" val="3464385553"/>
+                    </a:ext>
+                  </a:extLst>
+                </a:gridCol>
+                <a:gridCol w="3553638">
+                  <a:extLst>
+                    <a:ext uri="{9D8B030D-6E8A-4147-A177-3AD203B41FA5}">
+                      <a16:colId xmlns:a16="http://schemas.microsoft.com/office/drawing/2014/main" val="1974042333"/>
+                    </a:ext>
+                  </a:extLst>
+                </a:gridCol>
+              </a:tblGrid>
+              <a:tr h="370840">
+                <a:tc>
+                  <a:txBody>
+                    <a:bodyPr/>
+                    <a:lstStyle/>
+                    <a:p>
+                      <a:pPr latinLnBrk="1"/>
+                      <a:r>
+                        <a:rPr lang="ko-KR" altLang="en-US" b="1" dirty="0"/>
+                        <a:t>파라미터별 학습 보상</a:t>
+                      </a:r>
+                    </a:p>
+                  </a:txBody>
+                  <a:tcPr/>
+                </a:tc>
+                <a:tc>
+                  <a:txBody>
+                    <a:bodyPr/>
+                    <a:lstStyle/>
+                    <a:p>
+                      <a:pPr latinLnBrk="1"/>
+                      <a:endParaRPr lang="ko-KR" altLang="en-US" b="1" dirty="0"/>
+                    </a:p>
+                  </a:txBody>
+                  <a:tcPr/>
+                </a:tc>
+                <a:tc>
+                  <a:txBody>
+                    <a:bodyPr/>
+                    <a:lstStyle/>
+                    <a:p>
+                      <a:pPr latinLnBrk="1"/>
+                      <a:r>
+                        <a:rPr lang="en-US" altLang="ko-KR" b="1" dirty="0"/>
+                        <a:t>Greedy </a:t>
+                      </a:r>
+                      <a:r>
+                        <a:rPr lang="ko-KR" altLang="en-US" b="1" dirty="0"/>
+                        <a:t>평가 </a:t>
+                      </a:r>
+                      <a:r>
+                        <a:rPr lang="ko-KR" altLang="en-US" b="1" dirty="0" err="1"/>
+                        <a:t>히트맵</a:t>
+                      </a:r>
+                      <a:endParaRPr lang="ko-KR" altLang="en-US" b="1" dirty="0"/>
+                    </a:p>
+                  </a:txBody>
+                  <a:tcPr/>
+                </a:tc>
+                <a:extLst>
+                  <a:ext uri="{0D108BD9-81ED-4DB2-BD59-A6C34878D82A}">
+                    <a16:rowId xmlns:a16="http://schemas.microsoft.com/office/drawing/2014/main" val="1764033668"/>
+                  </a:ext>
+                </a:extLst>
+              </a:tr>
+              <a:tr h="370840">
+                <a:tc>
+                  <a:txBody>
+                    <a:bodyPr/>
+                    <a:lstStyle/>
+                    <a:p>
+                      <a:pPr latinLnBrk="1"/>
+                      <a:endParaRPr lang="ko-KR" altLang="en-US" b="1"/>
+                    </a:p>
+                  </a:txBody>
+                  <a:tcPr/>
+                </a:tc>
+                <a:tc>
+                  <a:txBody>
+                    <a:bodyPr/>
+                    <a:lstStyle/>
+                    <a:p>
+                      <a:pPr latinLnBrk="1"/>
+                      <a:endParaRPr lang="ko-KR" altLang="en-US" b="1"/>
+                    </a:p>
+                  </a:txBody>
+                  <a:tcPr/>
+                </a:tc>
+                <a:tc>
+                  <a:txBody>
+                    <a:bodyPr/>
+                    <a:lstStyle/>
+                    <a:p>
+                      <a:pPr latinLnBrk="1"/>
+                      <a:endParaRPr lang="ko-KR" altLang="en-US" b="1" dirty="0"/>
+                    </a:p>
+                  </a:txBody>
+                  <a:tcPr/>
+                </a:tc>
+                <a:extLst>
+                  <a:ext uri="{0D108BD9-81ED-4DB2-BD59-A6C34878D82A}">
+                    <a16:rowId xmlns:a16="http://schemas.microsoft.com/office/drawing/2014/main" val="1248983614"/>
+                  </a:ext>
+                </a:extLst>
+              </a:tr>
+            </a:tbl>
+          </a:graphicData>
+        </a:graphic>
+      </p:graphicFrame>
+      <p:pic>
+        <p:nvPicPr>
+          <p:cNvPr id="6" name="그림 5">
+            <a:extLst>
+              <a:ext uri="{FF2B5EF4-FFF2-40B4-BE49-F238E27FC236}">
+                <a16:creationId xmlns:a16="http://schemas.microsoft.com/office/drawing/2014/main" id="{AD8F004C-727C-26CA-8208-FC4CD418F70F}"/>
+              </a:ext>
+            </a:extLst>
+          </p:cNvPr>
+          <p:cNvPicPr>
+            <a:picLocks noChangeAspect="1"/>
+          </p:cNvPicPr>
+          <p:nvPr/>
+        </p:nvPicPr>
+        <p:blipFill>
+          <a:blip r:embed="rId2">
+            <a:extLst>
+              <a:ext uri="{28A0092B-C50C-407E-A947-70E740481C1C}">
+                <a14:useLocalDpi xmlns:a14="http://schemas.microsoft.com/office/drawing/2010/main" val="0"/>
+              </a:ext>
+            </a:extLst>
+          </a:blip>
+          <a:stretch>
+            <a:fillRect/>
+          </a:stretch>
+        </p:blipFill>
+        <p:spPr>
+          <a:xfrm>
+            <a:off x="765543" y="2791715"/>
+            <a:ext cx="6478774" cy="2355916"/>
+          </a:xfrm>
+          <a:prstGeom prst="rect">
+            <a:avLst/>
+          </a:prstGeom>
+        </p:spPr>
+      </p:pic>
+      <p:pic>
+        <p:nvPicPr>
+          <p:cNvPr id="8" name="그림 7">
+            <a:extLst>
+              <a:ext uri="{FF2B5EF4-FFF2-40B4-BE49-F238E27FC236}">
+                <a16:creationId xmlns:a16="http://schemas.microsoft.com/office/drawing/2014/main" id="{9EAA50DE-645A-0CC7-F442-4B5100114B71}"/>
+              </a:ext>
+            </a:extLst>
+          </p:cNvPr>
+          <p:cNvPicPr>
+            <a:picLocks noChangeAspect="1"/>
+          </p:cNvPicPr>
+          <p:nvPr/>
+        </p:nvPicPr>
+        <p:blipFill>
+          <a:blip r:embed="rId3">
+            <a:extLst>
+              <a:ext uri="{28A0092B-C50C-407E-A947-70E740481C1C}">
+                <a14:useLocalDpi xmlns:a14="http://schemas.microsoft.com/office/drawing/2010/main" val="0"/>
+              </a:ext>
+            </a:extLst>
+          </a:blip>
+          <a:stretch>
+            <a:fillRect/>
+          </a:stretch>
+        </p:blipFill>
+        <p:spPr>
+          <a:xfrm>
+            <a:off x="7316974" y="2863316"/>
+            <a:ext cx="3664759" cy="2355916"/>
+          </a:xfrm>
+          <a:prstGeom prst="rect">
+            <a:avLst/>
+          </a:prstGeom>
+        </p:spPr>
+      </p:pic>
     </p:spTree>
     <p:extLst>
       <p:ext uri="{BB962C8B-B14F-4D97-AF65-F5344CB8AC3E}">
-        <p14:creationId xmlns:p14="http://schemas.microsoft.com/office/powerpoint/2010/main" val="3977347988"/>
+        <p14:creationId xmlns:p14="http://schemas.microsoft.com/office/powerpoint/2010/main" val="829851047"/>
       </p:ext>
     </p:extLst>
   </p:cSld>
@@ -6289,7 +8598,7 @@
         <p:spPr>
           <a:xfrm>
             <a:off x="838200" y="1825625"/>
-            <a:ext cx="7909560" cy="4351338"/>
+            <a:ext cx="9560442" cy="4351338"/>
           </a:xfrm>
         </p:spPr>
         <p:txBody>
@@ -6301,7 +8610,572 @@
             </a:pPr>
             <a:r>
               <a:rPr lang="en-US" altLang="ko-KR" b="1" dirty="0"/>
-              <a:t>Temporal Difference Method – Q-Learning</a:t>
+              <a:t>Temporal Difference Method – SARSA | Alpha, Epsilon</a:t>
+            </a:r>
+            <a:endParaRPr lang="ko-KR" altLang="en-US" b="1" dirty="0"/>
+          </a:p>
+        </p:txBody>
+      </p:sp>
+      <p:sp>
+        <p:nvSpPr>
+          <p:cNvPr id="5" name="TextBox 4">
+            <a:extLst>
+              <a:ext uri="{FF2B5EF4-FFF2-40B4-BE49-F238E27FC236}">
+                <a16:creationId xmlns:a16="http://schemas.microsoft.com/office/drawing/2014/main" id="{6F72E5F3-15D7-ED72-35BC-2B09031FD665}"/>
+              </a:ext>
+            </a:extLst>
+          </p:cNvPr>
+          <p:cNvSpPr txBox="1"/>
+          <p:nvPr/>
+        </p:nvSpPr>
+        <p:spPr>
+          <a:xfrm>
+            <a:off x="838200" y="2278203"/>
+            <a:ext cx="9930632" cy="4001095"/>
+          </a:xfrm>
+          <a:prstGeom prst="rect">
+            <a:avLst/>
+          </a:prstGeom>
+          <a:noFill/>
+        </p:spPr>
+        <p:txBody>
+          <a:bodyPr wrap="square" rtlCol="0">
+            <a:spAutoFit/>
+          </a:bodyPr>
+          <a:lstStyle/>
+          <a:p>
+            <a:r>
+              <a:rPr lang="en-US" altLang="ko-KR" b="1" dirty="0"/>
+              <a:t>Alpha </a:t>
+            </a:r>
+            <a:r>
+              <a:rPr lang="ko-KR" altLang="en-US" b="1" dirty="0"/>
+              <a:t>변화에 따른 학습 보상</a:t>
+            </a:r>
+            <a:endParaRPr lang="en-US" altLang="ko-KR" b="1" dirty="0"/>
+          </a:p>
+          <a:p>
+            <a:pPr>
+              <a:buFont typeface="Arial" panose="020B0604020202020204" pitchFamily="34" charset="0"/>
+              <a:buChar char="•"/>
+            </a:pPr>
+            <a:r>
+              <a:rPr lang="en-US" altLang="ko-KR" sz="1400" b="1" dirty="0"/>
+              <a:t> Alpha 0.1:</a:t>
+            </a:r>
+            <a:r>
+              <a:rPr lang="ko-KR" altLang="en-US" sz="1400" dirty="0"/>
+              <a:t> 가장 높은 평균 보상 </a:t>
+            </a:r>
+            <a:r>
+              <a:rPr lang="en-US" altLang="ko-KR" sz="1400" dirty="0"/>
+              <a:t>0.405 </a:t>
+            </a:r>
+            <a:r>
+              <a:rPr lang="ko-KR" altLang="en-US" sz="1400" dirty="0"/>
+              <a:t>기록</a:t>
+            </a:r>
+            <a:r>
+              <a:rPr lang="en-US" altLang="ko-KR" sz="1400" dirty="0"/>
+              <a:t>. TD </a:t>
+            </a:r>
+            <a:r>
+              <a:rPr lang="ko-KR" altLang="en-US" sz="1400" dirty="0"/>
+              <a:t>오차를 작게 반영하여 </a:t>
+            </a:r>
+            <a:r>
+              <a:rPr lang="en-US" altLang="ko-KR" sz="1400" dirty="0"/>
+              <a:t>Q-Value</a:t>
+            </a:r>
+            <a:r>
+              <a:rPr lang="ko-KR" altLang="en-US" sz="1400" dirty="0"/>
+              <a:t>가 점진적으로 갱신됨</a:t>
+            </a:r>
+            <a:r>
+              <a:rPr lang="en-US" altLang="ko-KR" sz="1400" dirty="0"/>
+              <a:t>.</a:t>
+            </a:r>
+          </a:p>
+          <a:p>
+            <a:pPr>
+              <a:buFont typeface="Arial" panose="020B0604020202020204" pitchFamily="34" charset="0"/>
+              <a:buChar char="•"/>
+            </a:pPr>
+            <a:r>
+              <a:rPr lang="en-US" altLang="ko-KR" sz="1400" b="1" dirty="0"/>
+              <a:t> Alpha 0.3:</a:t>
+            </a:r>
+            <a:r>
+              <a:rPr lang="ko-KR" altLang="en-US" sz="1400" dirty="0"/>
+              <a:t> 평균 보상 </a:t>
+            </a:r>
+            <a:r>
+              <a:rPr lang="en-US" altLang="ko-KR" sz="1400" dirty="0"/>
+              <a:t>0.394 </a:t>
+            </a:r>
+            <a:r>
+              <a:rPr lang="ko-KR" altLang="en-US" sz="1400" dirty="0"/>
+              <a:t>기록</a:t>
+            </a:r>
+            <a:r>
+              <a:rPr lang="en-US" altLang="ko-KR" sz="1400" dirty="0"/>
+              <a:t>. </a:t>
+            </a:r>
+            <a:r>
+              <a:rPr lang="ko-KR" altLang="en-US" sz="1400" dirty="0" err="1"/>
+              <a:t>학습률</a:t>
+            </a:r>
+            <a:r>
+              <a:rPr lang="ko-KR" altLang="en-US" sz="1400" dirty="0"/>
+              <a:t> 증가에 따라 새로운 경험의 반영 비율이 높아짐</a:t>
+            </a:r>
+            <a:r>
+              <a:rPr lang="en-US" altLang="ko-KR" sz="1400" dirty="0"/>
+              <a:t>.</a:t>
+            </a:r>
+          </a:p>
+          <a:p>
+            <a:pPr>
+              <a:buFont typeface="Arial" panose="020B0604020202020204" pitchFamily="34" charset="0"/>
+              <a:buChar char="•"/>
+            </a:pPr>
+            <a:r>
+              <a:rPr lang="en-US" altLang="ko-KR" sz="1400" b="1" dirty="0"/>
+              <a:t> Alpha 0.8:</a:t>
+            </a:r>
+            <a:r>
+              <a:rPr lang="ko-KR" altLang="en-US" sz="1400" dirty="0"/>
+              <a:t> 평균 보상 </a:t>
+            </a:r>
+            <a:r>
+              <a:rPr lang="en-US" altLang="ko-KR" sz="1400" dirty="0"/>
+              <a:t>0.304</a:t>
+            </a:r>
+            <a:r>
+              <a:rPr lang="ko-KR" altLang="en-US" sz="1400" dirty="0"/>
+              <a:t>로 감소</a:t>
+            </a:r>
+            <a:r>
+              <a:rPr lang="en-US" altLang="ko-KR" sz="1400" dirty="0"/>
+              <a:t>. </a:t>
+            </a:r>
+            <a:r>
+              <a:rPr lang="ko-KR" altLang="en-US" sz="1400" dirty="0"/>
+              <a:t>높은 </a:t>
+            </a:r>
+            <a:r>
+              <a:rPr lang="ko-KR" altLang="en-US" sz="1400" dirty="0" err="1"/>
+              <a:t>학습률로</a:t>
+            </a:r>
+            <a:r>
+              <a:rPr lang="ko-KR" altLang="en-US" sz="1400" dirty="0"/>
+              <a:t> 인해 </a:t>
+            </a:r>
+            <a:r>
+              <a:rPr lang="en-US" altLang="ko-KR" sz="1400" dirty="0"/>
+              <a:t>Q-Value </a:t>
+            </a:r>
+            <a:r>
+              <a:rPr lang="ko-KR" altLang="en-US" sz="1400" dirty="0"/>
+              <a:t>변동성이 증가하고 실험 간 편차가 커짐</a:t>
+            </a:r>
+            <a:r>
+              <a:rPr lang="en-US" altLang="ko-KR" sz="1400" dirty="0"/>
+              <a:t>.</a:t>
+            </a:r>
+          </a:p>
+          <a:p>
+            <a:pPr>
+              <a:buFont typeface="Arial" panose="020B0604020202020204" pitchFamily="34" charset="0"/>
+              <a:buChar char="•"/>
+            </a:pPr>
+            <a:r>
+              <a:rPr lang="ko-KR" altLang="en-US" sz="1400" b="1" dirty="0"/>
+              <a:t> 분석</a:t>
+            </a:r>
+            <a:r>
+              <a:rPr lang="en-US" altLang="ko-KR" sz="1400" b="1" dirty="0"/>
+              <a:t>:</a:t>
+            </a:r>
+            <a:r>
+              <a:rPr lang="ko-KR" altLang="en-US" sz="1400" dirty="0"/>
+              <a:t> </a:t>
+            </a:r>
+            <a:r>
+              <a:rPr lang="en-US" altLang="ko-KR" sz="1400" dirty="0"/>
+              <a:t>Alpha </a:t>
+            </a:r>
+            <a:r>
+              <a:rPr lang="ko-KR" altLang="en-US" sz="1400" dirty="0"/>
+              <a:t>증가에 따라 평균 보상이 감소하는 경향을 확인</a:t>
+            </a:r>
+            <a:r>
+              <a:rPr lang="en-US" altLang="ko-KR" sz="1400" dirty="0"/>
+              <a:t>. </a:t>
+            </a:r>
+            <a:r>
+              <a:rPr lang="ko-KR" altLang="en-US" sz="1400" dirty="0"/>
+              <a:t>탐색 행동까지 학습에 반영하는 </a:t>
+            </a:r>
+            <a:r>
+              <a:rPr lang="en-US" altLang="ko-KR" sz="1400" dirty="0"/>
+              <a:t>On-Policy </a:t>
+            </a:r>
+            <a:r>
+              <a:rPr lang="ko-KR" altLang="en-US" sz="1400" dirty="0"/>
+              <a:t>특성과 관련됨</a:t>
+            </a:r>
+            <a:r>
+              <a:rPr lang="en-US" altLang="ko-KR" sz="1400" dirty="0"/>
+              <a:t>.</a:t>
+            </a:r>
+          </a:p>
+          <a:p>
+            <a:pPr>
+              <a:buFont typeface="Arial" panose="020B0604020202020204" pitchFamily="34" charset="0"/>
+              <a:buChar char="•"/>
+            </a:pPr>
+            <a:endParaRPr lang="en-US" altLang="ko-KR" sz="1400" dirty="0"/>
+          </a:p>
+          <a:p>
+            <a:r>
+              <a:rPr lang="en-US" altLang="ko-KR" b="1" dirty="0"/>
+              <a:t>Epsilon </a:t>
+            </a:r>
+            <a:r>
+              <a:rPr lang="ko-KR" altLang="en-US" b="1" dirty="0"/>
+              <a:t>변화에 따른 학습 보상</a:t>
+            </a:r>
+            <a:endParaRPr lang="en-US" altLang="ko-KR" b="1" dirty="0"/>
+          </a:p>
+          <a:p>
+            <a:pPr>
+              <a:buFont typeface="Arial" panose="020B0604020202020204" pitchFamily="34" charset="0"/>
+              <a:buChar char="•"/>
+            </a:pPr>
+            <a:r>
+              <a:rPr lang="en-US" altLang="ko-KR" sz="1400" b="1" dirty="0"/>
+              <a:t> Epsilon 0.01:</a:t>
+            </a:r>
+            <a:r>
+              <a:rPr lang="ko-KR" altLang="en-US" sz="1400" dirty="0"/>
+              <a:t> 평균 보상 </a:t>
+            </a:r>
+            <a:r>
+              <a:rPr lang="en-US" altLang="ko-KR" sz="1400" dirty="0"/>
+              <a:t>0.384 </a:t>
+            </a:r>
+            <a:r>
+              <a:rPr lang="ko-KR" altLang="en-US" sz="1400" dirty="0"/>
+              <a:t>기록</a:t>
+            </a:r>
+            <a:r>
+              <a:rPr lang="en-US" altLang="ko-KR" sz="1400" dirty="0"/>
+              <a:t>. </a:t>
+            </a:r>
+            <a:r>
+              <a:rPr lang="ko-KR" altLang="en-US" sz="1400" dirty="0"/>
+              <a:t>탐색 행동이 적어 높은 보상을 유지하지만 실험 간 편차가 크게 나타남</a:t>
+            </a:r>
+            <a:r>
+              <a:rPr lang="en-US" altLang="ko-KR" sz="1400" dirty="0"/>
+              <a:t>.</a:t>
+            </a:r>
+          </a:p>
+          <a:p>
+            <a:pPr>
+              <a:buFont typeface="Arial" panose="020B0604020202020204" pitchFamily="34" charset="0"/>
+              <a:buChar char="•"/>
+            </a:pPr>
+            <a:r>
+              <a:rPr lang="en-US" altLang="ko-KR" sz="1400" b="1" dirty="0"/>
+              <a:t> Epsilon 0.1~0.3:</a:t>
+            </a:r>
+            <a:r>
+              <a:rPr lang="ko-KR" altLang="en-US" sz="1400" dirty="0"/>
+              <a:t> 평균 보상 </a:t>
+            </a:r>
+            <a:r>
+              <a:rPr lang="en-US" altLang="ko-KR" sz="1400" dirty="0"/>
+              <a:t>0.304 → 0.125 </a:t>
+            </a:r>
+            <a:r>
+              <a:rPr lang="ko-KR" altLang="en-US" sz="1400" dirty="0"/>
+              <a:t>감소</a:t>
+            </a:r>
+            <a:r>
+              <a:rPr lang="en-US" altLang="ko-KR" sz="1400" dirty="0"/>
+              <a:t>. </a:t>
+            </a:r>
+            <a:r>
+              <a:rPr lang="ko-KR" altLang="en-US" sz="1400" dirty="0"/>
+              <a:t>탐색 확률 증가로 </a:t>
+            </a:r>
+            <a:r>
+              <a:rPr lang="ko-KR" altLang="en-US" sz="1400" dirty="0" err="1"/>
+              <a:t>비최적</a:t>
+            </a:r>
+            <a:r>
+              <a:rPr lang="ko-KR" altLang="en-US" sz="1400" dirty="0"/>
+              <a:t> 행동 및 우회 이동 발생 가능성 증가</a:t>
+            </a:r>
+            <a:r>
+              <a:rPr lang="en-US" altLang="ko-KR" sz="1400" dirty="0"/>
+              <a:t>.</a:t>
+            </a:r>
+          </a:p>
+          <a:p>
+            <a:pPr>
+              <a:buFont typeface="Arial" panose="020B0604020202020204" pitchFamily="34" charset="0"/>
+              <a:buChar char="•"/>
+            </a:pPr>
+            <a:r>
+              <a:rPr lang="en-US" altLang="ko-KR" sz="1400" b="1" dirty="0"/>
+              <a:t> Epsilon 0.5:</a:t>
+            </a:r>
+            <a:r>
+              <a:rPr lang="ko-KR" altLang="en-US" sz="1400" dirty="0"/>
+              <a:t> 평균 보상 </a:t>
+            </a:r>
+            <a:r>
+              <a:rPr lang="en-US" altLang="ko-KR" sz="1400" dirty="0"/>
+              <a:t>0.021 </a:t>
+            </a:r>
+            <a:r>
+              <a:rPr lang="ko-KR" altLang="en-US" sz="1400" dirty="0"/>
+              <a:t>기록</a:t>
+            </a:r>
+            <a:r>
+              <a:rPr lang="en-US" altLang="ko-KR" sz="1400" dirty="0"/>
+              <a:t>. </a:t>
+            </a:r>
+            <a:r>
+              <a:rPr lang="ko-KR" altLang="en-US" sz="1400" dirty="0"/>
+              <a:t>잦은 탐색으로 이동 효율이 감소함</a:t>
+            </a:r>
+            <a:r>
+              <a:rPr lang="en-US" altLang="ko-KR" sz="1400" dirty="0"/>
+              <a:t>.</a:t>
+            </a:r>
+          </a:p>
+          <a:p>
+            <a:pPr>
+              <a:buFont typeface="Arial" panose="020B0604020202020204" pitchFamily="34" charset="0"/>
+              <a:buChar char="•"/>
+            </a:pPr>
+            <a:r>
+              <a:rPr lang="ko-KR" altLang="en-US" sz="1400" b="1" dirty="0"/>
+              <a:t> 분석</a:t>
+            </a:r>
+            <a:r>
+              <a:rPr lang="en-US" altLang="ko-KR" sz="1400" b="1" dirty="0"/>
+              <a:t>:</a:t>
+            </a:r>
+            <a:r>
+              <a:rPr lang="ko-KR" altLang="en-US" sz="1400" dirty="0"/>
+              <a:t> </a:t>
+            </a:r>
+            <a:r>
+              <a:rPr lang="en-US" altLang="ko-KR" sz="1400" dirty="0"/>
+              <a:t>Epsilon </a:t>
+            </a:r>
+            <a:r>
+              <a:rPr lang="ko-KR" altLang="en-US" sz="1400" dirty="0"/>
+              <a:t>증가에 따라 학습 중 보상이 감소하며</a:t>
+            </a:r>
+            <a:r>
+              <a:rPr lang="en-US" altLang="ko-KR" sz="1400" dirty="0"/>
+              <a:t>, SARSA</a:t>
+            </a:r>
+            <a:r>
+              <a:rPr lang="ko-KR" altLang="en-US" sz="1400" dirty="0"/>
+              <a:t>는 실제 선택한 다음 행동을 </a:t>
+            </a:r>
+            <a:r>
+              <a:rPr lang="en-US" altLang="ko-KR" sz="1400" dirty="0"/>
+              <a:t>TD Target</a:t>
+            </a:r>
+            <a:r>
+              <a:rPr lang="ko-KR" altLang="en-US" sz="1400" dirty="0"/>
+              <a:t>에 반영함</a:t>
+            </a:r>
+            <a:r>
+              <a:rPr lang="en-US" altLang="ko-KR" sz="1400" dirty="0"/>
+              <a:t>.</a:t>
+            </a:r>
+          </a:p>
+          <a:p>
+            <a:pPr>
+              <a:buFont typeface="Arial" panose="020B0604020202020204" pitchFamily="34" charset="0"/>
+              <a:buChar char="•"/>
+            </a:pPr>
+            <a:endParaRPr lang="en-US" altLang="ko-KR" sz="1400" dirty="0"/>
+          </a:p>
+          <a:p>
+            <a:r>
+              <a:rPr lang="en-US" altLang="ko-KR" b="1" dirty="0"/>
+              <a:t>Alpha-Epsilon Greedy </a:t>
+            </a:r>
+            <a:r>
+              <a:rPr lang="ko-KR" altLang="en-US" b="1" dirty="0"/>
+              <a:t>평가 </a:t>
+            </a:r>
+            <a:r>
+              <a:rPr lang="ko-KR" altLang="en-US" b="1" dirty="0" err="1"/>
+              <a:t>히트맵</a:t>
+            </a:r>
+            <a:endParaRPr lang="en-US" altLang="ko-KR" b="1" dirty="0"/>
+          </a:p>
+          <a:p>
+            <a:pPr>
+              <a:buFont typeface="Arial" panose="020B0604020202020204" pitchFamily="34" charset="0"/>
+              <a:buChar char="•"/>
+            </a:pPr>
+            <a:r>
+              <a:rPr lang="en-US" altLang="ko-KR" sz="1400" b="1" dirty="0"/>
+              <a:t> Alpha 0.1:</a:t>
+            </a:r>
+            <a:r>
+              <a:rPr lang="ko-KR" altLang="en-US" sz="1400" dirty="0"/>
+              <a:t> 모든 </a:t>
+            </a:r>
+            <a:r>
+              <a:rPr lang="en-US" altLang="ko-KR" sz="1400" dirty="0"/>
+              <a:t>Epsilon </a:t>
+            </a:r>
+            <a:r>
+              <a:rPr lang="ko-KR" altLang="en-US" sz="1400" dirty="0"/>
+              <a:t>조건에서 평가 보상 </a:t>
+            </a:r>
+            <a:r>
+              <a:rPr lang="en-US" altLang="ko-KR" sz="1400" dirty="0"/>
+              <a:t>0.478 </a:t>
+            </a:r>
+            <a:r>
+              <a:rPr lang="ko-KR" altLang="en-US" sz="1400" dirty="0"/>
+              <a:t>기록</a:t>
+            </a:r>
+            <a:r>
+              <a:rPr lang="en-US" altLang="ko-KR" sz="1400" dirty="0"/>
+              <a:t>. </a:t>
+            </a:r>
+            <a:r>
+              <a:rPr lang="ko-KR" altLang="en-US" sz="1400" dirty="0"/>
+              <a:t>안정적인 최종 정책 형성</a:t>
+            </a:r>
+            <a:r>
+              <a:rPr lang="en-US" altLang="ko-KR" sz="1400" dirty="0"/>
+              <a:t>.</a:t>
+            </a:r>
+          </a:p>
+          <a:p>
+            <a:pPr>
+              <a:buFont typeface="Arial" panose="020B0604020202020204" pitchFamily="34" charset="0"/>
+              <a:buChar char="•"/>
+            </a:pPr>
+            <a:r>
+              <a:rPr lang="en-US" altLang="ko-KR" sz="1400" b="1" dirty="0"/>
+              <a:t> Alpha 0.3:</a:t>
+            </a:r>
+            <a:r>
+              <a:rPr lang="ko-KR" altLang="en-US" sz="1400" dirty="0"/>
+              <a:t> 일부 조합에서 평가 보상 </a:t>
+            </a:r>
+            <a:r>
+              <a:rPr lang="en-US" altLang="ko-KR" sz="1400" dirty="0"/>
+              <a:t>0.383~0.460</a:t>
+            </a:r>
+            <a:r>
+              <a:rPr lang="ko-KR" altLang="en-US" sz="1400" dirty="0"/>
+              <a:t>으로 감소</a:t>
+            </a:r>
+            <a:r>
+              <a:rPr lang="en-US" altLang="ko-KR" sz="1400" dirty="0"/>
+              <a:t>. </a:t>
+            </a:r>
+            <a:r>
+              <a:rPr lang="ko-KR" altLang="en-US" sz="1400" dirty="0"/>
+              <a:t>파라미터에 따른 정책 성능 차이 발생</a:t>
+            </a:r>
+            <a:r>
+              <a:rPr lang="en-US" altLang="ko-KR" sz="1400" dirty="0"/>
+              <a:t>.</a:t>
+            </a:r>
+          </a:p>
+          <a:p>
+            <a:pPr>
+              <a:buFont typeface="Arial" panose="020B0604020202020204" pitchFamily="34" charset="0"/>
+              <a:buChar char="•"/>
+            </a:pPr>
+            <a:r>
+              <a:rPr lang="en-US" altLang="ko-KR" sz="1400" b="1" dirty="0"/>
+              <a:t> Alpha 0.8:</a:t>
+            </a:r>
+            <a:r>
+              <a:rPr lang="ko-KR" altLang="en-US" sz="1400" dirty="0"/>
+              <a:t> </a:t>
+            </a:r>
+            <a:r>
+              <a:rPr lang="en-US" altLang="ko-KR" sz="1400" dirty="0"/>
+              <a:t>Epsilon 0.5</a:t>
+            </a:r>
+            <a:r>
+              <a:rPr lang="ko-KR" altLang="en-US" sz="1400" dirty="0"/>
+              <a:t>에서 평가 보상 </a:t>
+            </a:r>
+            <a:r>
+              <a:rPr lang="en-US" altLang="ko-KR" sz="1400" dirty="0"/>
+              <a:t>0.096, </a:t>
+            </a:r>
+            <a:r>
+              <a:rPr lang="ko-KR" altLang="en-US" sz="1400" dirty="0"/>
+              <a:t>목표 도달 성공률 </a:t>
+            </a:r>
+            <a:r>
+              <a:rPr lang="en-US" altLang="ko-KR" sz="1400" dirty="0"/>
+              <a:t>20% </a:t>
+            </a:r>
+            <a:r>
+              <a:rPr lang="ko-KR" altLang="en-US" sz="1400" dirty="0"/>
+              <a:t>기록</a:t>
+            </a:r>
+            <a:r>
+              <a:rPr lang="en-US" altLang="ko-KR" sz="1400" dirty="0"/>
+              <a:t>.</a:t>
+            </a:r>
+          </a:p>
+          <a:p>
+            <a:pPr>
+              <a:buFont typeface="Arial" panose="020B0604020202020204" pitchFamily="34" charset="0"/>
+              <a:buChar char="•"/>
+            </a:pPr>
+            <a:r>
+              <a:rPr lang="ko-KR" altLang="en-US" sz="1400" b="1" dirty="0"/>
+              <a:t> 분석</a:t>
+            </a:r>
+            <a:r>
+              <a:rPr lang="en-US" altLang="ko-KR" sz="1400" b="1" dirty="0"/>
+              <a:t>:</a:t>
+            </a:r>
+            <a:r>
+              <a:rPr lang="ko-KR" altLang="en-US" sz="1400" dirty="0"/>
+              <a:t> 높은 </a:t>
+            </a:r>
+            <a:r>
+              <a:rPr lang="en-US" altLang="ko-KR" sz="1400" dirty="0"/>
+              <a:t>Alpha </a:t>
+            </a:r>
+            <a:r>
+              <a:rPr lang="ko-KR" altLang="en-US" sz="1400" dirty="0"/>
+              <a:t>조건에서 최종 정책의 성능 저하와 실험 간 편차가 확인됨</a:t>
+            </a:r>
+            <a:r>
+              <a:rPr lang="en-US" altLang="ko-KR" sz="1400" dirty="0"/>
+              <a:t>.</a:t>
+            </a:r>
+            <a:r>
+              <a:rPr lang="en-US" altLang="ko-KR" b="1" dirty="0"/>
+              <a:t>	</a:t>
             </a:r>
             <a:endParaRPr lang="ko-KR" altLang="en-US" b="1" dirty="0"/>
           </a:p>
@@ -6310,7 +9184,7 @@
     </p:spTree>
     <p:extLst>
       <p:ext uri="{BB962C8B-B14F-4D97-AF65-F5344CB8AC3E}">
-        <p14:creationId xmlns:p14="http://schemas.microsoft.com/office/powerpoint/2010/main" val="1948267706"/>
+        <p14:creationId xmlns:p14="http://schemas.microsoft.com/office/powerpoint/2010/main" val="3255352950"/>
       </p:ext>
     </p:extLst>
   </p:cSld>
@@ -6342,7 +9216,7 @@
           <p:cNvPr id="2" name="제목 1">
             <a:extLst>
               <a:ext uri="{FF2B5EF4-FFF2-40B4-BE49-F238E27FC236}">
-                <a16:creationId xmlns:a16="http://schemas.microsoft.com/office/drawing/2014/main" id="{4F5A8108-ED05-C8B3-538C-B61C977CDB8A}"/>
+                <a16:creationId xmlns:a16="http://schemas.microsoft.com/office/drawing/2014/main" id="{05F47E05-2409-F2F5-E759-8FF54D92678B}"/>
               </a:ext>
             </a:extLst>
           </p:cNvPr>
@@ -6360,7 +9234,7 @@
           <a:p>
             <a:r>
               <a:rPr lang="ko-KR" altLang="en-US" dirty="0"/>
-              <a:t>과제 결과</a:t>
+              <a:t>과제 풀이</a:t>
             </a:r>
           </a:p>
         </p:txBody>
@@ -6370,7 +9244,7 @@
           <p:cNvPr id="3" name="내용 개체 틀 2">
             <a:extLst>
               <a:ext uri="{FF2B5EF4-FFF2-40B4-BE49-F238E27FC236}">
-                <a16:creationId xmlns:a16="http://schemas.microsoft.com/office/drawing/2014/main" id="{E7C4356A-B9C5-EDE9-1DDC-9DA3BC6B9B9A}"/>
+                <a16:creationId xmlns:a16="http://schemas.microsoft.com/office/drawing/2014/main" id="{5852B724-E47B-9C14-9E1F-E5FE5A5B6B63}"/>
               </a:ext>
             </a:extLst>
           </p:cNvPr>
@@ -6381,44 +9255,666 @@
             <p:ph idx="1"/>
           </p:nvPr>
         </p:nvSpPr>
+        <p:spPr>
+          <a:xfrm>
+            <a:off x="838200" y="1825625"/>
+            <a:ext cx="7909560" cy="4351338"/>
+          </a:xfrm>
+        </p:spPr>
+        <p:txBody>
+          <a:bodyPr/>
+          <a:lstStyle/>
+          <a:p>
+            <a:pPr marL="0" indent="0">
+              <a:buNone/>
+            </a:pPr>
+            <a:r>
+              <a:rPr lang="en-US" altLang="ko-KR" b="1" dirty="0"/>
+              <a:t>Temporal Difference Method – Q-Learning</a:t>
+            </a:r>
+          </a:p>
+          <a:p>
+            <a:pPr marL="0" indent="0">
+              <a:buNone/>
+            </a:pPr>
+            <a:r>
+              <a:rPr lang="ko-KR" altLang="en-US" sz="1400" b="0" dirty="0">
+                <a:latin typeface="맑은 고딕"/>
+              </a:rPr>
+              <a:t>기준 실험 </a:t>
+            </a:r>
+            <a:r>
+              <a:rPr lang="el-GR" altLang="ko-KR" sz="1400" b="0" dirty="0">
+                <a:latin typeface="맑은 고딕"/>
+              </a:rPr>
+              <a:t>α=0.8  ·  ε=0.1  ·  γ=0.9  ·  10,000 </a:t>
+            </a:r>
+            <a:r>
+              <a:rPr lang="en-US" altLang="ko-KR" sz="1400" b="0" dirty="0">
+                <a:latin typeface="맑은 고딕"/>
+              </a:rPr>
+              <a:t>episodes</a:t>
+            </a:r>
+          </a:p>
+          <a:p>
+            <a:pPr marL="0" indent="0">
+              <a:buNone/>
+            </a:pPr>
+            <a:endParaRPr lang="ko-KR" altLang="en-US" sz="1400" b="1" dirty="0"/>
+          </a:p>
+        </p:txBody>
+      </p:sp>
+      <p:graphicFrame>
+        <p:nvGraphicFramePr>
+          <p:cNvPr id="5" name="표 4">
+            <a:extLst>
+              <a:ext uri="{FF2B5EF4-FFF2-40B4-BE49-F238E27FC236}">
+                <a16:creationId xmlns:a16="http://schemas.microsoft.com/office/drawing/2014/main" id="{2BA7E514-D5FF-FAC0-CB5E-B454970C1262}"/>
+              </a:ext>
+            </a:extLst>
+          </p:cNvPr>
+          <p:cNvGraphicFramePr>
+            <a:graphicFrameLocks noGrp="1"/>
+          </p:cNvGraphicFramePr>
+          <p:nvPr>
+            <p:extLst>
+              <p:ext uri="{D42A27DB-BD31-4B8C-83A1-F6EECF244321}">
+                <p14:modId xmlns:p14="http://schemas.microsoft.com/office/powerpoint/2010/main" val="475796853"/>
+              </p:ext>
+            </p:extLst>
+          </p:nvPr>
+        </p:nvGraphicFramePr>
+        <p:xfrm>
+          <a:off x="744279" y="2789468"/>
+          <a:ext cx="10703442" cy="741680"/>
+        </p:xfrm>
+        <a:graphic>
+          <a:graphicData uri="http://schemas.openxmlformats.org/drawingml/2006/table">
+            <a:tbl>
+              <a:tblPr firstRow="1" bandRow="1">
+                <a:tableStyleId>{2D5ABB26-0587-4C30-8999-92F81FD0307C}</a:tableStyleId>
+              </a:tblPr>
+              <a:tblGrid>
+                <a:gridCol w="5351721">
+                  <a:extLst>
+                    <a:ext uri="{9D8B030D-6E8A-4147-A177-3AD203B41FA5}">
+                      <a16:colId xmlns:a16="http://schemas.microsoft.com/office/drawing/2014/main" val="4045138800"/>
+                    </a:ext>
+                  </a:extLst>
+                </a:gridCol>
+                <a:gridCol w="5351721">
+                  <a:extLst>
+                    <a:ext uri="{9D8B030D-6E8A-4147-A177-3AD203B41FA5}">
+                      <a16:colId xmlns:a16="http://schemas.microsoft.com/office/drawing/2014/main" val="877522094"/>
+                    </a:ext>
+                  </a:extLst>
+                </a:gridCol>
+              </a:tblGrid>
+              <a:tr h="370840">
+                <a:tc>
+                  <a:txBody>
+                    <a:bodyPr/>
+                    <a:lstStyle/>
+                    <a:p>
+                      <a:pPr algn="ctr" latinLnBrk="1"/>
+                      <a:r>
+                        <a:rPr lang="en-US" altLang="ko-KR" b="1" dirty="0"/>
+                        <a:t>Q-Value</a:t>
+                      </a:r>
+                      <a:endParaRPr lang="ko-KR" altLang="en-US" b="1" dirty="0"/>
+                    </a:p>
+                  </a:txBody>
+                  <a:tcPr/>
+                </a:tc>
+                <a:tc>
+                  <a:txBody>
+                    <a:bodyPr/>
+                    <a:lstStyle/>
+                    <a:p>
+                      <a:pPr algn="ctr" latinLnBrk="1"/>
+                      <a:r>
+                        <a:rPr lang="en-US" altLang="ko-KR" b="1" dirty="0"/>
+                        <a:t>Greedy Policy</a:t>
+                      </a:r>
+                      <a:endParaRPr lang="ko-KR" altLang="en-US" b="1" dirty="0"/>
+                    </a:p>
+                  </a:txBody>
+                  <a:tcPr/>
+                </a:tc>
+                <a:extLst>
+                  <a:ext uri="{0D108BD9-81ED-4DB2-BD59-A6C34878D82A}">
+                    <a16:rowId xmlns:a16="http://schemas.microsoft.com/office/drawing/2014/main" val="2569930744"/>
+                  </a:ext>
+                </a:extLst>
+              </a:tr>
+              <a:tr h="370840">
+                <a:tc>
+                  <a:txBody>
+                    <a:bodyPr/>
+                    <a:lstStyle/>
+                    <a:p>
+                      <a:pPr latinLnBrk="1"/>
+                      <a:endParaRPr lang="ko-KR" altLang="en-US" dirty="0"/>
+                    </a:p>
+                  </a:txBody>
+                  <a:tcPr/>
+                </a:tc>
+                <a:tc>
+                  <a:txBody>
+                    <a:bodyPr/>
+                    <a:lstStyle/>
+                    <a:p>
+                      <a:pPr latinLnBrk="1"/>
+                      <a:endParaRPr lang="ko-KR" altLang="en-US" dirty="0"/>
+                    </a:p>
+                  </a:txBody>
+                  <a:tcPr/>
+                </a:tc>
+                <a:extLst>
+                  <a:ext uri="{0D108BD9-81ED-4DB2-BD59-A6C34878D82A}">
+                    <a16:rowId xmlns:a16="http://schemas.microsoft.com/office/drawing/2014/main" val="471399227"/>
+                  </a:ext>
+                </a:extLst>
+              </a:tr>
+            </a:tbl>
+          </a:graphicData>
+        </a:graphic>
+      </p:graphicFrame>
+      <p:pic>
+        <p:nvPicPr>
+          <p:cNvPr id="7" name="그림 6">
+            <a:extLst>
+              <a:ext uri="{FF2B5EF4-FFF2-40B4-BE49-F238E27FC236}">
+                <a16:creationId xmlns:a16="http://schemas.microsoft.com/office/drawing/2014/main" id="{9FE25693-67B8-9D8C-A9D4-CC3AB3EECD44}"/>
+              </a:ext>
+            </a:extLst>
+          </p:cNvPr>
+          <p:cNvPicPr>
+            <a:picLocks noChangeAspect="1"/>
+          </p:cNvPicPr>
+          <p:nvPr/>
+        </p:nvPicPr>
+        <p:blipFill>
+          <a:blip r:embed="rId2"/>
+          <a:stretch>
+            <a:fillRect/>
+          </a:stretch>
+        </p:blipFill>
+        <p:spPr>
+          <a:xfrm>
+            <a:off x="1326051" y="3145065"/>
+            <a:ext cx="4155394" cy="3031898"/>
+          </a:xfrm>
+          <a:prstGeom prst="rect">
+            <a:avLst/>
+          </a:prstGeom>
+        </p:spPr>
+      </p:pic>
+      <p:pic>
+        <p:nvPicPr>
+          <p:cNvPr id="9" name="그림 8">
+            <a:extLst>
+              <a:ext uri="{FF2B5EF4-FFF2-40B4-BE49-F238E27FC236}">
+                <a16:creationId xmlns:a16="http://schemas.microsoft.com/office/drawing/2014/main" id="{B28FFEE2-2258-B98E-4EFE-782A32409AD5}"/>
+              </a:ext>
+            </a:extLst>
+          </p:cNvPr>
+          <p:cNvPicPr>
+            <a:picLocks noChangeAspect="1"/>
+          </p:cNvPicPr>
+          <p:nvPr/>
+        </p:nvPicPr>
+        <p:blipFill>
+          <a:blip r:embed="rId3"/>
+          <a:stretch>
+            <a:fillRect/>
+          </a:stretch>
+        </p:blipFill>
+        <p:spPr>
+          <a:xfrm>
+            <a:off x="6764374" y="3174893"/>
+            <a:ext cx="3966772" cy="2999824"/>
+          </a:xfrm>
+          <a:prstGeom prst="rect">
+            <a:avLst/>
+          </a:prstGeom>
+        </p:spPr>
+      </p:pic>
+    </p:spTree>
+    <p:extLst>
+      <p:ext uri="{BB962C8B-B14F-4D97-AF65-F5344CB8AC3E}">
+        <p14:creationId xmlns:p14="http://schemas.microsoft.com/office/powerpoint/2010/main" val="3977347988"/>
+      </p:ext>
+    </p:extLst>
+  </p:cSld>
+  <p:clrMapOvr>
+    <a:masterClrMapping/>
+  </p:clrMapOvr>
+</p:sld>
+</file>
+
+<file path=ppt/slides/slide9.xml><?xml version="1.0" encoding="utf-8"?>
+<p:sld xmlns:a="http://schemas.openxmlformats.org/drawingml/2006/main" xmlns:r="http://schemas.openxmlformats.org/officeDocument/2006/relationships" xmlns:p="http://schemas.openxmlformats.org/presentationml/2006/main">
+  <p:cSld>
+    <p:spTree>
+      <p:nvGrpSpPr>
+        <p:cNvPr id="1" name=""/>
+        <p:cNvGrpSpPr/>
+        <p:nvPr/>
+      </p:nvGrpSpPr>
+      <p:grpSpPr>
+        <a:xfrm>
+          <a:off x="0" y="0"/>
+          <a:ext cx="0" cy="0"/>
+          <a:chOff x="0" y="0"/>
+          <a:chExt cx="0" cy="0"/>
+        </a:xfrm>
+      </p:grpSpPr>
+      <p:sp>
+        <p:nvSpPr>
+          <p:cNvPr id="2" name="제목 1">
+            <a:extLst>
+              <a:ext uri="{FF2B5EF4-FFF2-40B4-BE49-F238E27FC236}">
+                <a16:creationId xmlns:a16="http://schemas.microsoft.com/office/drawing/2014/main" id="{05F47E05-2409-F2F5-E759-8FF54D92678B}"/>
+              </a:ext>
+            </a:extLst>
+          </p:cNvPr>
+          <p:cNvSpPr>
+            <a:spLocks noGrp="1"/>
+          </p:cNvSpPr>
+          <p:nvPr>
+            <p:ph type="title"/>
+          </p:nvPr>
+        </p:nvSpPr>
         <p:spPr/>
         <p:txBody>
           <a:bodyPr/>
           <a:lstStyle/>
           <a:p>
-            <a:pPr marL="514350" indent="-514350">
-              <a:buFont typeface="+mj-lt"/>
-              <a:buAutoNum type="arabicPeriod"/>
-            </a:pPr>
-            <a:r>
-              <a:rPr lang="en-US" altLang="ko-KR" b="1" dirty="0"/>
-              <a:t>SARAS</a:t>
-            </a:r>
-          </a:p>
-          <a:p>
-            <a:pPr lvl="1"/>
-            <a:endParaRPr lang="en-US" altLang="ko-KR" dirty="0"/>
-          </a:p>
-          <a:p>
-            <a:pPr marL="514350" indent="-514350">
-              <a:buFont typeface="+mj-lt"/>
-              <a:buAutoNum type="arabicPeriod"/>
-            </a:pPr>
-            <a:r>
-              <a:rPr lang="en-US" altLang="ko-KR" b="1" dirty="0"/>
-              <a:t>Q-Learning</a:t>
-            </a:r>
-          </a:p>
-          <a:p>
-            <a:pPr lvl="1"/>
-            <a:endParaRPr lang="en-US" altLang="ko-KR" dirty="0"/>
+            <a:r>
+              <a:rPr lang="ko-KR" altLang="en-US" dirty="0"/>
+              <a:t>과제 풀이</a:t>
+            </a:r>
           </a:p>
         </p:txBody>
       </p:sp>
+      <p:sp>
+        <p:nvSpPr>
+          <p:cNvPr id="3" name="내용 개체 틀 2">
+            <a:extLst>
+              <a:ext uri="{FF2B5EF4-FFF2-40B4-BE49-F238E27FC236}">
+                <a16:creationId xmlns:a16="http://schemas.microsoft.com/office/drawing/2014/main" id="{5852B724-E47B-9C14-9E1F-E5FE5A5B6B63}"/>
+              </a:ext>
+            </a:extLst>
+          </p:cNvPr>
+          <p:cNvSpPr>
+            <a:spLocks noGrp="1"/>
+          </p:cNvSpPr>
+          <p:nvPr>
+            <p:ph idx="1"/>
+          </p:nvPr>
+        </p:nvSpPr>
+        <p:spPr>
+          <a:xfrm>
+            <a:off x="838199" y="1825625"/>
+            <a:ext cx="9773093" cy="4351338"/>
+          </a:xfrm>
+        </p:spPr>
+        <p:txBody>
+          <a:bodyPr/>
+          <a:lstStyle/>
+          <a:p>
+            <a:pPr marL="0" indent="0">
+              <a:buNone/>
+            </a:pPr>
+            <a:r>
+              <a:rPr lang="en-US" altLang="ko-KR" b="1" dirty="0"/>
+              <a:t>Temporal Difference Method – Q-Learning | </a:t>
+            </a:r>
+            <a:r>
+              <a:rPr lang="ko-KR" altLang="en-US" b="1" dirty="0"/>
+              <a:t>학습 곡선</a:t>
+            </a:r>
+            <a:endParaRPr lang="en-US" altLang="ko-KR" b="1" dirty="0"/>
+          </a:p>
+          <a:p>
+            <a:pPr marL="0" indent="0">
+              <a:buNone/>
+            </a:pPr>
+            <a:r>
+              <a:rPr lang="en-US" altLang="ko-KR" sz="1400" b="0" dirty="0">
+                <a:solidFill>
+                  <a:srgbClr val="76808A"/>
+                </a:solidFill>
+                <a:latin typeface="맑은 고딕"/>
+              </a:rPr>
+              <a:t>10,000</a:t>
+            </a:r>
+            <a:r>
+              <a:rPr lang="ko-KR" altLang="en-US" sz="1400" b="0" dirty="0">
+                <a:solidFill>
+                  <a:srgbClr val="76808A"/>
+                </a:solidFill>
+                <a:latin typeface="맑은 고딕"/>
+              </a:rPr>
+              <a:t>회 학습 </a:t>
+            </a:r>
+            <a:r>
+              <a:rPr lang="en-US" altLang="ko-KR" sz="1400" b="0" dirty="0">
+                <a:solidFill>
+                  <a:srgbClr val="76808A"/>
+                </a:solidFill>
+                <a:latin typeface="맑은 고딕"/>
+              </a:rPr>
+              <a:t>· </a:t>
+            </a:r>
+            <a:r>
+              <a:rPr lang="ko-KR" altLang="en-US" sz="1400" b="0" dirty="0">
+                <a:solidFill>
+                  <a:srgbClr val="76808A"/>
+                </a:solidFill>
+                <a:latin typeface="맑은 고딕"/>
+              </a:rPr>
+              <a:t>보상 </a:t>
+            </a:r>
+            <a:r>
+              <a:rPr lang="en-US" altLang="ko-KR" sz="1400" b="0" dirty="0">
+                <a:solidFill>
+                  <a:srgbClr val="76808A"/>
+                </a:solidFill>
+                <a:latin typeface="맑은 고딕"/>
+              </a:rPr>
+              <a:t>/ </a:t>
+            </a:r>
+            <a:r>
+              <a:rPr lang="ko-KR" altLang="en-US" sz="1400" b="0" dirty="0">
+                <a:solidFill>
+                  <a:srgbClr val="76808A"/>
+                </a:solidFill>
+                <a:latin typeface="맑은 고딕"/>
+              </a:rPr>
+              <a:t>스텝 </a:t>
+            </a:r>
+            <a:r>
+              <a:rPr lang="en-US" altLang="ko-KR" sz="1400" b="0" dirty="0">
+                <a:solidFill>
+                  <a:srgbClr val="76808A"/>
+                </a:solidFill>
+                <a:latin typeface="맑은 고딕"/>
+              </a:rPr>
+              <a:t>/ </a:t>
+            </a:r>
+            <a:r>
+              <a:rPr lang="ko-KR" altLang="en-US" sz="1400" b="0" dirty="0">
+                <a:solidFill>
+                  <a:srgbClr val="76808A"/>
+                </a:solidFill>
+                <a:latin typeface="맑은 고딕"/>
+              </a:rPr>
+              <a:t>종료 성공률 </a:t>
+            </a:r>
+            <a:r>
+              <a:rPr lang="en-US" altLang="ko-KR" sz="1400" b="0" dirty="0">
+                <a:solidFill>
+                  <a:srgbClr val="76808A"/>
+                </a:solidFill>
+                <a:latin typeface="맑은 고딕"/>
+              </a:rPr>
+              <a:t>· 100-episode </a:t>
+            </a:r>
+            <a:r>
+              <a:rPr lang="ko-KR" altLang="en-US" sz="1400" b="0" dirty="0">
+                <a:solidFill>
+                  <a:srgbClr val="76808A"/>
+                </a:solidFill>
+                <a:latin typeface="맑은 고딕"/>
+              </a:rPr>
+              <a:t>이동평균</a:t>
+            </a:r>
+          </a:p>
+          <a:p>
+            <a:pPr marL="0" indent="0">
+              <a:buNone/>
+            </a:pPr>
+            <a:endParaRPr lang="ko-KR" altLang="en-US" sz="1400" dirty="0"/>
+          </a:p>
+        </p:txBody>
+      </p:sp>
+      <p:pic>
+        <p:nvPicPr>
+          <p:cNvPr id="7" name="그림 6">
+            <a:extLst>
+              <a:ext uri="{FF2B5EF4-FFF2-40B4-BE49-F238E27FC236}">
+                <a16:creationId xmlns:a16="http://schemas.microsoft.com/office/drawing/2014/main" id="{6841EDE3-038E-A037-21E1-EC0B9DD8DB5B}"/>
+              </a:ext>
+            </a:extLst>
+          </p:cNvPr>
+          <p:cNvPicPr>
+            <a:picLocks noChangeAspect="1"/>
+          </p:cNvPicPr>
+          <p:nvPr/>
+        </p:nvPicPr>
+        <p:blipFill>
+          <a:blip r:embed="rId2">
+            <a:extLst>
+              <a:ext uri="{28A0092B-C50C-407E-A947-70E740481C1C}">
+                <a14:useLocalDpi xmlns:a14="http://schemas.microsoft.com/office/drawing/2010/main" val="0"/>
+              </a:ext>
+            </a:extLst>
+          </a:blip>
+          <a:stretch>
+            <a:fillRect/>
+          </a:stretch>
+        </p:blipFill>
+        <p:spPr>
+          <a:xfrm>
+            <a:off x="723014" y="2627061"/>
+            <a:ext cx="10745972" cy="2865592"/>
+          </a:xfrm>
+          <a:prstGeom prst="rect">
+            <a:avLst/>
+          </a:prstGeom>
+        </p:spPr>
+      </p:pic>
+      <p:graphicFrame>
+        <p:nvGraphicFramePr>
+          <p:cNvPr id="8" name="표 7">
+            <a:extLst>
+              <a:ext uri="{FF2B5EF4-FFF2-40B4-BE49-F238E27FC236}">
+                <a16:creationId xmlns:a16="http://schemas.microsoft.com/office/drawing/2014/main" id="{4B3B7DC5-7641-16D0-C891-C3E16AF6CABE}"/>
+              </a:ext>
+            </a:extLst>
+          </p:cNvPr>
+          <p:cNvGraphicFramePr>
+            <a:graphicFrameLocks noGrp="1"/>
+          </p:cNvGraphicFramePr>
+          <p:nvPr>
+            <p:extLst>
+              <p:ext uri="{D42A27DB-BD31-4B8C-83A1-F6EECF244321}">
+                <p14:modId xmlns:p14="http://schemas.microsoft.com/office/powerpoint/2010/main" val="798693735"/>
+              </p:ext>
+            </p:extLst>
+          </p:nvPr>
+        </p:nvGraphicFramePr>
+        <p:xfrm>
+          <a:off x="1259955" y="5557158"/>
+          <a:ext cx="10093845" cy="670560"/>
+        </p:xfrm>
+        <a:graphic>
+          <a:graphicData uri="http://schemas.openxmlformats.org/drawingml/2006/table">
+            <a:tbl>
+              <a:tblPr firstRow="1" bandRow="1">
+                <a:tableStyleId>{2D5ABB26-0587-4C30-8999-92F81FD0307C}</a:tableStyleId>
+              </a:tblPr>
+              <a:tblGrid>
+                <a:gridCol w="3364615">
+                  <a:extLst>
+                    <a:ext uri="{9D8B030D-6E8A-4147-A177-3AD203B41FA5}">
+                      <a16:colId xmlns:a16="http://schemas.microsoft.com/office/drawing/2014/main" val="2869937718"/>
+                    </a:ext>
+                  </a:extLst>
+                </a:gridCol>
+                <a:gridCol w="3364615">
+                  <a:extLst>
+                    <a:ext uri="{9D8B030D-6E8A-4147-A177-3AD203B41FA5}">
+                      <a16:colId xmlns:a16="http://schemas.microsoft.com/office/drawing/2014/main" val="3799848100"/>
+                    </a:ext>
+                  </a:extLst>
+                </a:gridCol>
+                <a:gridCol w="3364615">
+                  <a:extLst>
+                    <a:ext uri="{9D8B030D-6E8A-4147-A177-3AD203B41FA5}">
+                      <a16:colId xmlns:a16="http://schemas.microsoft.com/office/drawing/2014/main" val="2848995611"/>
+                    </a:ext>
+                  </a:extLst>
+                </a:gridCol>
+              </a:tblGrid>
+              <a:tr h="264256">
+                <a:tc>
+                  <a:txBody>
+                    <a:bodyPr/>
+                    <a:lstStyle/>
+                    <a:p>
+                      <a:pPr algn="ctr" latinLnBrk="1"/>
+                      <a:r>
+                        <a:rPr lang="ko-KR" altLang="en-US" sz="1400" b="0" dirty="0"/>
+                        <a:t>마지막 </a:t>
+                      </a:r>
+                      <a:r>
+                        <a:rPr lang="en-US" altLang="ko-KR" sz="1400" b="0" dirty="0"/>
+                        <a:t>100</a:t>
+                      </a:r>
+                      <a:r>
+                        <a:rPr lang="ko-KR" altLang="en-US" sz="1400" b="0" dirty="0"/>
+                        <a:t>회 평균보상</a:t>
+                      </a:r>
+                    </a:p>
+                  </a:txBody>
+                  <a:tcPr/>
+                </a:tc>
+                <a:tc>
+                  <a:txBody>
+                    <a:bodyPr/>
+                    <a:lstStyle/>
+                    <a:p>
+                      <a:pPr algn="ctr" latinLnBrk="1"/>
+                      <a:r>
+                        <a:rPr lang="ko-KR" altLang="en-US" sz="1400" b="0" dirty="0"/>
+                        <a:t>마지막 </a:t>
+                      </a:r>
+                      <a:r>
+                        <a:rPr lang="en-US" altLang="ko-KR" sz="1400" b="0" dirty="0"/>
+                        <a:t>100</a:t>
+                      </a:r>
+                      <a:r>
+                        <a:rPr lang="ko-KR" altLang="en-US" sz="1400" b="0" dirty="0"/>
+                        <a:t>회 평균 </a:t>
+                      </a:r>
+                      <a:r>
+                        <a:rPr lang="en-US" altLang="ko-KR" sz="1400" b="0" dirty="0"/>
+                        <a:t>Step</a:t>
+                      </a:r>
+                      <a:endParaRPr lang="ko-KR" altLang="en-US" sz="1400" b="0" dirty="0"/>
+                    </a:p>
+                  </a:txBody>
+                  <a:tcPr/>
+                </a:tc>
+                <a:tc>
+                  <a:txBody>
+                    <a:bodyPr/>
+                    <a:lstStyle/>
+                    <a:p>
+                      <a:pPr algn="ctr" latinLnBrk="1"/>
+                      <a:r>
+                        <a:rPr lang="ko-KR" altLang="en-US" sz="1400" b="0" dirty="0"/>
+                        <a:t>마지막 </a:t>
+                      </a:r>
+                      <a:r>
+                        <a:rPr lang="en-US" altLang="ko-KR" sz="1400" b="0" dirty="0"/>
+                        <a:t>100</a:t>
+                      </a:r>
+                      <a:r>
+                        <a:rPr lang="ko-KR" altLang="en-US" sz="1400" b="0" dirty="0"/>
+                        <a:t>회</a:t>
+                      </a:r>
+                      <a:r>
+                        <a:rPr lang="en-US" altLang="ko-KR" sz="1400" b="0" dirty="0"/>
+                        <a:t> </a:t>
+                      </a:r>
+                      <a:r>
+                        <a:rPr lang="ko-KR" altLang="en-US" sz="1400" b="0" dirty="0"/>
+                        <a:t>종료 성공률</a:t>
+                      </a:r>
+                    </a:p>
+                  </a:txBody>
+                  <a:tcPr/>
+                </a:tc>
+                <a:extLst>
+                  <a:ext uri="{0D108BD9-81ED-4DB2-BD59-A6C34878D82A}">
+                    <a16:rowId xmlns:a16="http://schemas.microsoft.com/office/drawing/2014/main" val="943329619"/>
+                  </a:ext>
+                </a:extLst>
+              </a:tr>
+              <a:tr h="317108">
+                <a:tc>
+                  <a:txBody>
+                    <a:bodyPr/>
+                    <a:lstStyle/>
+                    <a:p>
+                      <a:pPr latinLnBrk="1"/>
+                      <a:r>
+                        <a:rPr lang="en-US" altLang="ko-KR" b="1" dirty="0"/>
+                        <a:t>0.407</a:t>
+                      </a:r>
+                      <a:endParaRPr lang="ko-KR" altLang="en-US" b="1" dirty="0"/>
+                    </a:p>
+                  </a:txBody>
+                  <a:tcPr/>
+                </a:tc>
+                <a:tc>
+                  <a:txBody>
+                    <a:bodyPr/>
+                    <a:lstStyle/>
+                    <a:p>
+                      <a:pPr latinLnBrk="1"/>
+                      <a:r>
+                        <a:rPr lang="en-US" altLang="ko-KR" b="1" dirty="0"/>
+                        <a:t>9.02</a:t>
+                      </a:r>
+                      <a:endParaRPr lang="ko-KR" altLang="en-US" b="1" dirty="0"/>
+                    </a:p>
+                  </a:txBody>
+                  <a:tcPr/>
+                </a:tc>
+                <a:tc>
+                  <a:txBody>
+                    <a:bodyPr/>
+                    <a:lstStyle/>
+                    <a:p>
+                      <a:pPr latinLnBrk="1"/>
+                      <a:r>
+                        <a:rPr lang="en-US" altLang="ko-KR" b="1" dirty="0"/>
+                        <a:t>100%</a:t>
+                      </a:r>
+                      <a:endParaRPr lang="ko-KR" altLang="en-US" b="1" dirty="0"/>
+                    </a:p>
+                  </a:txBody>
+                  <a:tcPr/>
+                </a:tc>
+                <a:extLst>
+                  <a:ext uri="{0D108BD9-81ED-4DB2-BD59-A6C34878D82A}">
+                    <a16:rowId xmlns:a16="http://schemas.microsoft.com/office/drawing/2014/main" val="751209890"/>
+                  </a:ext>
+                </a:extLst>
+              </a:tr>
+            </a:tbl>
+          </a:graphicData>
+        </a:graphic>
+      </p:graphicFrame>
     </p:spTree>
     <p:extLst>
       <p:ext uri="{BB962C8B-B14F-4D97-AF65-F5344CB8AC3E}">
-        <p14:creationId xmlns:p14="http://schemas.microsoft.com/office/powerpoint/2010/main" val="2170711995"/>
+        <p14:creationId xmlns:p14="http://schemas.microsoft.com/office/powerpoint/2010/main" val="1948267706"/>
       </p:ext>
     </p:extLst>
   </p:cSld>
